--- a/我要頌揚_國語版.pptx
+++ b/我要頌揚_國語版.pptx
@@ -12,14 +12,6 @@
     <p:sldId id="263" r:id="rId6"/>
     <p:sldId id="264" r:id="rId7"/>
     <p:sldId id="267" r:id="rId8"/>
-    <p:sldId id="268" r:id="rId9"/>
-    <p:sldId id="269" r:id="rId10"/>
-    <p:sldId id="270" r:id="rId11"/>
-    <p:sldId id="271" r:id="rId12"/>
-    <p:sldId id="272" r:id="rId13"/>
-    <p:sldId id="273" r:id="rId14"/>
-    <p:sldId id="265" r:id="rId15"/>
-    <p:sldId id="274" r:id="rId16"/>
   </p:sldIdLst>
   <p:sldSz cx="12192000" cy="6858000"/>
   <p:notesSz cx="6858000" cy="9144000"/>
@@ -120,7 +112,7 @@
   </p:defaultTextStyle>
   <p:extLst>
     <p:ext uri="{EFAFB233-063F-42B5-8137-9DF3F51BA10A}">
-      <p15:sldGuideLst xmlns:p15="http://schemas.microsoft.com/office/powerpoint/2012/main" xmlns="">
+      <p15:sldGuideLst xmlns:p15="http://schemas.microsoft.com/office/powerpoint/2012/main">
         <p15:guide id="1" orient="horz" pos="2160" userDrawn="1">
           <p15:clr>
             <a:srgbClr val="A4A3A4"/>
@@ -175,10 +167,9 @@
           <a:lstStyle/>
           <a:p>
             <a:r>
-              <a:rPr lang="zh-TW" altLang="en-US" smtClean="0"/>
+              <a:rPr lang="zh-TW" altLang="en-US"/>
               <a:t>按一下以編輯母片標題樣式</a:t>
             </a:r>
-            <a:endParaRPr lang="zh-TW" altLang="en-US"/>
           </a:p>
         </p:txBody>
       </p:sp>
@@ -294,10 +285,9 @@
           </a:lstStyle>
           <a:p>
             <a:r>
-              <a:rPr lang="zh-TW" altLang="en-US" smtClean="0"/>
+              <a:rPr lang="zh-TW" altLang="en-US"/>
               <a:t>按一下以編輯母片副標題樣式</a:t>
             </a:r>
-            <a:endParaRPr lang="zh-TW" altLang="en-US"/>
           </a:p>
         </p:txBody>
       </p:sp>
@@ -319,7 +309,7 @@
             <a:fld id="{A95F74E7-4BF7-4687-8727-E26A2E617AB2}" type="datetimeFigureOut">
               <a:rPr lang="zh-TW" altLang="en-US" smtClean="0"/>
               <a:pPr/>
-              <a:t>2023/8/8</a:t>
+              <a:t>2025/4/25</a:t>
             </a:fld>
             <a:endParaRPr lang="zh-TW" altLang="en-US"/>
           </a:p>
@@ -409,10 +399,9 @@
           <a:lstStyle/>
           <a:p>
             <a:r>
-              <a:rPr lang="zh-TW" altLang="en-US" smtClean="0"/>
+              <a:rPr lang="zh-TW" altLang="en-US"/>
               <a:t>按一下以編輯母片標題樣式</a:t>
             </a:r>
-            <a:endParaRPr lang="zh-TW" altLang="en-US"/>
           </a:p>
         </p:txBody>
       </p:sp>
@@ -433,38 +422,37 @@
           <a:p>
             <a:pPr lvl="0"/>
             <a:r>
-              <a:rPr lang="zh-TW" altLang="en-US" smtClean="0"/>
+              <a:rPr lang="zh-TW" altLang="en-US"/>
               <a:t>按一下以編輯母片文字樣式</a:t>
             </a:r>
           </a:p>
           <a:p>
             <a:pPr lvl="1"/>
             <a:r>
-              <a:rPr lang="zh-TW" altLang="en-US" smtClean="0"/>
+              <a:rPr lang="zh-TW" altLang="en-US"/>
               <a:t>第二層</a:t>
             </a:r>
           </a:p>
           <a:p>
             <a:pPr lvl="2"/>
             <a:r>
-              <a:rPr lang="zh-TW" altLang="en-US" smtClean="0"/>
+              <a:rPr lang="zh-TW" altLang="en-US"/>
               <a:t>第三層</a:t>
             </a:r>
           </a:p>
           <a:p>
             <a:pPr lvl="3"/>
             <a:r>
-              <a:rPr lang="zh-TW" altLang="en-US" smtClean="0"/>
+              <a:rPr lang="zh-TW" altLang="en-US"/>
               <a:t>第四層</a:t>
             </a:r>
           </a:p>
           <a:p>
             <a:pPr lvl="4"/>
             <a:r>
-              <a:rPr lang="zh-TW" altLang="en-US" smtClean="0"/>
+              <a:rPr lang="zh-TW" altLang="en-US"/>
               <a:t>第五層</a:t>
             </a:r>
-            <a:endParaRPr lang="zh-TW" altLang="en-US"/>
           </a:p>
         </p:txBody>
       </p:sp>
@@ -486,7 +474,7 @@
             <a:fld id="{A95F74E7-4BF7-4687-8727-E26A2E617AB2}" type="datetimeFigureOut">
               <a:rPr lang="zh-TW" altLang="en-US" smtClean="0"/>
               <a:pPr/>
-              <a:t>2023/8/8</a:t>
+              <a:t>2025/4/25</a:t>
             </a:fld>
             <a:endParaRPr lang="zh-TW" altLang="en-US"/>
           </a:p>
@@ -581,10 +569,9 @@
           <a:lstStyle/>
           <a:p>
             <a:r>
-              <a:rPr lang="zh-TW" altLang="en-US" smtClean="0"/>
+              <a:rPr lang="zh-TW" altLang="en-US"/>
               <a:t>按一下以編輯母片標題樣式</a:t>
             </a:r>
-            <a:endParaRPr lang="zh-TW" altLang="en-US"/>
           </a:p>
         </p:txBody>
       </p:sp>
@@ -610,38 +597,37 @@
           <a:p>
             <a:pPr lvl="0"/>
             <a:r>
-              <a:rPr lang="zh-TW" altLang="en-US" smtClean="0"/>
+              <a:rPr lang="zh-TW" altLang="en-US"/>
               <a:t>按一下以編輯母片文字樣式</a:t>
             </a:r>
           </a:p>
           <a:p>
             <a:pPr lvl="1"/>
             <a:r>
-              <a:rPr lang="zh-TW" altLang="en-US" smtClean="0"/>
+              <a:rPr lang="zh-TW" altLang="en-US"/>
               <a:t>第二層</a:t>
             </a:r>
           </a:p>
           <a:p>
             <a:pPr lvl="2"/>
             <a:r>
-              <a:rPr lang="zh-TW" altLang="en-US" smtClean="0"/>
+              <a:rPr lang="zh-TW" altLang="en-US"/>
               <a:t>第三層</a:t>
             </a:r>
           </a:p>
           <a:p>
             <a:pPr lvl="3"/>
             <a:r>
-              <a:rPr lang="zh-TW" altLang="en-US" smtClean="0"/>
+              <a:rPr lang="zh-TW" altLang="en-US"/>
               <a:t>第四層</a:t>
             </a:r>
           </a:p>
           <a:p>
             <a:pPr lvl="4"/>
             <a:r>
-              <a:rPr lang="zh-TW" altLang="en-US" smtClean="0"/>
+              <a:rPr lang="zh-TW" altLang="en-US"/>
               <a:t>第五層</a:t>
             </a:r>
-            <a:endParaRPr lang="zh-TW" altLang="en-US"/>
           </a:p>
         </p:txBody>
       </p:sp>
@@ -663,7 +649,7 @@
             <a:fld id="{A95F74E7-4BF7-4687-8727-E26A2E617AB2}" type="datetimeFigureOut">
               <a:rPr lang="zh-TW" altLang="en-US" smtClean="0"/>
               <a:pPr/>
-              <a:t>2023/8/8</a:t>
+              <a:t>2025/4/25</a:t>
             </a:fld>
             <a:endParaRPr lang="zh-TW" altLang="en-US"/>
           </a:p>
@@ -753,10 +739,9 @@
           <a:lstStyle/>
           <a:p>
             <a:r>
-              <a:rPr lang="zh-TW" altLang="en-US" smtClean="0"/>
+              <a:rPr lang="zh-TW" altLang="en-US"/>
               <a:t>按一下以編輯母片標題樣式</a:t>
             </a:r>
-            <a:endParaRPr lang="zh-TW" altLang="en-US"/>
           </a:p>
         </p:txBody>
       </p:sp>
@@ -777,38 +762,37 @@
           <a:p>
             <a:pPr lvl="0"/>
             <a:r>
-              <a:rPr lang="zh-TW" altLang="en-US" smtClean="0"/>
+              <a:rPr lang="zh-TW" altLang="en-US"/>
               <a:t>按一下以編輯母片文字樣式</a:t>
             </a:r>
           </a:p>
           <a:p>
             <a:pPr lvl="1"/>
             <a:r>
-              <a:rPr lang="zh-TW" altLang="en-US" smtClean="0"/>
+              <a:rPr lang="zh-TW" altLang="en-US"/>
               <a:t>第二層</a:t>
             </a:r>
           </a:p>
           <a:p>
             <a:pPr lvl="2"/>
             <a:r>
-              <a:rPr lang="zh-TW" altLang="en-US" smtClean="0"/>
+              <a:rPr lang="zh-TW" altLang="en-US"/>
               <a:t>第三層</a:t>
             </a:r>
           </a:p>
           <a:p>
             <a:pPr lvl="3"/>
             <a:r>
-              <a:rPr lang="zh-TW" altLang="en-US" smtClean="0"/>
+              <a:rPr lang="zh-TW" altLang="en-US"/>
               <a:t>第四層</a:t>
             </a:r>
           </a:p>
           <a:p>
             <a:pPr lvl="4"/>
             <a:r>
-              <a:rPr lang="zh-TW" altLang="en-US" smtClean="0"/>
+              <a:rPr lang="zh-TW" altLang="en-US"/>
               <a:t>第五層</a:t>
             </a:r>
-            <a:endParaRPr lang="zh-TW" altLang="en-US"/>
           </a:p>
         </p:txBody>
       </p:sp>
@@ -830,7 +814,7 @@
             <a:fld id="{A95F74E7-4BF7-4687-8727-E26A2E617AB2}" type="datetimeFigureOut">
               <a:rPr lang="zh-TW" altLang="en-US" smtClean="0"/>
               <a:pPr/>
-              <a:t>2023/8/8</a:t>
+              <a:t>2025/4/25</a:t>
             </a:fld>
             <a:endParaRPr lang="zh-TW" altLang="en-US"/>
           </a:p>
@@ -929,10 +913,9 @@
           </a:lstStyle>
           <a:p>
             <a:r>
-              <a:rPr lang="zh-TW" altLang="en-US" smtClean="0"/>
+              <a:rPr lang="zh-TW" altLang="en-US"/>
               <a:t>按一下以編輯母片標題樣式</a:t>
             </a:r>
-            <a:endParaRPr lang="zh-TW" altLang="en-US"/>
           </a:p>
         </p:txBody>
       </p:sp>
@@ -1049,7 +1032,7 @@
           <a:p>
             <a:pPr lvl="0"/>
             <a:r>
-              <a:rPr lang="zh-TW" altLang="en-US" smtClean="0"/>
+              <a:rPr lang="zh-TW" altLang="en-US"/>
               <a:t>按一下以編輯母片文字樣式</a:t>
             </a:r>
           </a:p>
@@ -1073,7 +1056,7 @@
             <a:fld id="{A95F74E7-4BF7-4687-8727-E26A2E617AB2}" type="datetimeFigureOut">
               <a:rPr lang="zh-TW" altLang="en-US" smtClean="0"/>
               <a:pPr/>
-              <a:t>2023/8/8</a:t>
+              <a:t>2025/4/25</a:t>
             </a:fld>
             <a:endParaRPr lang="zh-TW" altLang="en-US"/>
           </a:p>
@@ -1163,10 +1146,9 @@
           <a:lstStyle/>
           <a:p>
             <a:r>
-              <a:rPr lang="zh-TW" altLang="en-US" smtClean="0"/>
+              <a:rPr lang="zh-TW" altLang="en-US"/>
               <a:t>按一下以編輯母片標題樣式</a:t>
             </a:r>
-            <a:endParaRPr lang="zh-TW" altLang="en-US"/>
           </a:p>
         </p:txBody>
       </p:sp>
@@ -1220,38 +1202,37 @@
           <a:p>
             <a:pPr lvl="0"/>
             <a:r>
-              <a:rPr lang="zh-TW" altLang="en-US" smtClean="0"/>
+              <a:rPr lang="zh-TW" altLang="en-US"/>
               <a:t>按一下以編輯母片文字樣式</a:t>
             </a:r>
           </a:p>
           <a:p>
             <a:pPr lvl="1"/>
             <a:r>
-              <a:rPr lang="zh-TW" altLang="en-US" smtClean="0"/>
+              <a:rPr lang="zh-TW" altLang="en-US"/>
               <a:t>第二層</a:t>
             </a:r>
           </a:p>
           <a:p>
             <a:pPr lvl="2"/>
             <a:r>
-              <a:rPr lang="zh-TW" altLang="en-US" smtClean="0"/>
+              <a:rPr lang="zh-TW" altLang="en-US"/>
               <a:t>第三層</a:t>
             </a:r>
           </a:p>
           <a:p>
             <a:pPr lvl="3"/>
             <a:r>
-              <a:rPr lang="zh-TW" altLang="en-US" smtClean="0"/>
+              <a:rPr lang="zh-TW" altLang="en-US"/>
               <a:t>第四層</a:t>
             </a:r>
           </a:p>
           <a:p>
             <a:pPr lvl="4"/>
             <a:r>
-              <a:rPr lang="zh-TW" altLang="en-US" smtClean="0"/>
+              <a:rPr lang="zh-TW" altLang="en-US"/>
               <a:t>第五層</a:t>
             </a:r>
-            <a:endParaRPr lang="zh-TW" altLang="en-US"/>
           </a:p>
         </p:txBody>
       </p:sp>
@@ -1305,38 +1286,37 @@
           <a:p>
             <a:pPr lvl="0"/>
             <a:r>
-              <a:rPr lang="zh-TW" altLang="en-US" smtClean="0"/>
+              <a:rPr lang="zh-TW" altLang="en-US"/>
               <a:t>按一下以編輯母片文字樣式</a:t>
             </a:r>
           </a:p>
           <a:p>
             <a:pPr lvl="1"/>
             <a:r>
-              <a:rPr lang="zh-TW" altLang="en-US" smtClean="0"/>
+              <a:rPr lang="zh-TW" altLang="en-US"/>
               <a:t>第二層</a:t>
             </a:r>
           </a:p>
           <a:p>
             <a:pPr lvl="2"/>
             <a:r>
-              <a:rPr lang="zh-TW" altLang="en-US" smtClean="0"/>
+              <a:rPr lang="zh-TW" altLang="en-US"/>
               <a:t>第三層</a:t>
             </a:r>
           </a:p>
           <a:p>
             <a:pPr lvl="3"/>
             <a:r>
-              <a:rPr lang="zh-TW" altLang="en-US" smtClean="0"/>
+              <a:rPr lang="zh-TW" altLang="en-US"/>
               <a:t>第四層</a:t>
             </a:r>
           </a:p>
           <a:p>
             <a:pPr lvl="4"/>
             <a:r>
-              <a:rPr lang="zh-TW" altLang="en-US" smtClean="0"/>
+              <a:rPr lang="zh-TW" altLang="en-US"/>
               <a:t>第五層</a:t>
             </a:r>
-            <a:endParaRPr lang="zh-TW" altLang="en-US"/>
           </a:p>
         </p:txBody>
       </p:sp>
@@ -1358,7 +1338,7 @@
             <a:fld id="{A95F74E7-4BF7-4687-8727-E26A2E617AB2}" type="datetimeFigureOut">
               <a:rPr lang="zh-TW" altLang="en-US" smtClean="0"/>
               <a:pPr/>
-              <a:t>2023/8/8</a:t>
+              <a:t>2025/4/25</a:t>
             </a:fld>
             <a:endParaRPr lang="zh-TW" altLang="en-US"/>
           </a:p>
@@ -1452,10 +1432,9 @@
           </a:lstStyle>
           <a:p>
             <a:r>
-              <a:rPr lang="zh-TW" altLang="en-US" smtClean="0"/>
+              <a:rPr lang="zh-TW" altLang="en-US"/>
               <a:t>按一下以編輯母片標題樣式</a:t>
             </a:r>
-            <a:endParaRPr lang="zh-TW" altLang="en-US"/>
           </a:p>
         </p:txBody>
       </p:sp>
@@ -1518,7 +1497,7 @@
           <a:p>
             <a:pPr lvl="0"/>
             <a:r>
-              <a:rPr lang="zh-TW" altLang="en-US" smtClean="0"/>
+              <a:rPr lang="zh-TW" altLang="en-US"/>
               <a:t>按一下以編輯母片文字樣式</a:t>
             </a:r>
           </a:p>
@@ -1574,38 +1553,37 @@
           <a:p>
             <a:pPr lvl="0"/>
             <a:r>
-              <a:rPr lang="zh-TW" altLang="en-US" smtClean="0"/>
+              <a:rPr lang="zh-TW" altLang="en-US"/>
               <a:t>按一下以編輯母片文字樣式</a:t>
             </a:r>
           </a:p>
           <a:p>
             <a:pPr lvl="1"/>
             <a:r>
-              <a:rPr lang="zh-TW" altLang="en-US" smtClean="0"/>
+              <a:rPr lang="zh-TW" altLang="en-US"/>
               <a:t>第二層</a:t>
             </a:r>
           </a:p>
           <a:p>
             <a:pPr lvl="2"/>
             <a:r>
-              <a:rPr lang="zh-TW" altLang="en-US" smtClean="0"/>
+              <a:rPr lang="zh-TW" altLang="en-US"/>
               <a:t>第三層</a:t>
             </a:r>
           </a:p>
           <a:p>
             <a:pPr lvl="3"/>
             <a:r>
-              <a:rPr lang="zh-TW" altLang="en-US" smtClean="0"/>
+              <a:rPr lang="zh-TW" altLang="en-US"/>
               <a:t>第四層</a:t>
             </a:r>
           </a:p>
           <a:p>
             <a:pPr lvl="4"/>
             <a:r>
-              <a:rPr lang="zh-TW" altLang="en-US" smtClean="0"/>
+              <a:rPr lang="zh-TW" altLang="en-US"/>
               <a:t>第五層</a:t>
             </a:r>
-            <a:endParaRPr lang="zh-TW" altLang="en-US"/>
           </a:p>
         </p:txBody>
       </p:sp>
@@ -1668,7 +1646,7 @@
           <a:p>
             <a:pPr lvl="0"/>
             <a:r>
-              <a:rPr lang="zh-TW" altLang="en-US" smtClean="0"/>
+              <a:rPr lang="zh-TW" altLang="en-US"/>
               <a:t>按一下以編輯母片文字樣式</a:t>
             </a:r>
           </a:p>
@@ -1724,38 +1702,37 @@
           <a:p>
             <a:pPr lvl="0"/>
             <a:r>
-              <a:rPr lang="zh-TW" altLang="en-US" smtClean="0"/>
+              <a:rPr lang="zh-TW" altLang="en-US"/>
               <a:t>按一下以編輯母片文字樣式</a:t>
             </a:r>
           </a:p>
           <a:p>
             <a:pPr lvl="1"/>
             <a:r>
-              <a:rPr lang="zh-TW" altLang="en-US" smtClean="0"/>
+              <a:rPr lang="zh-TW" altLang="en-US"/>
               <a:t>第二層</a:t>
             </a:r>
           </a:p>
           <a:p>
             <a:pPr lvl="2"/>
             <a:r>
-              <a:rPr lang="zh-TW" altLang="en-US" smtClean="0"/>
+              <a:rPr lang="zh-TW" altLang="en-US"/>
               <a:t>第三層</a:t>
             </a:r>
           </a:p>
           <a:p>
             <a:pPr lvl="3"/>
             <a:r>
-              <a:rPr lang="zh-TW" altLang="en-US" smtClean="0"/>
+              <a:rPr lang="zh-TW" altLang="en-US"/>
               <a:t>第四層</a:t>
             </a:r>
           </a:p>
           <a:p>
             <a:pPr lvl="4"/>
             <a:r>
-              <a:rPr lang="zh-TW" altLang="en-US" smtClean="0"/>
+              <a:rPr lang="zh-TW" altLang="en-US"/>
               <a:t>第五層</a:t>
             </a:r>
-            <a:endParaRPr lang="zh-TW" altLang="en-US"/>
           </a:p>
         </p:txBody>
       </p:sp>
@@ -1777,7 +1754,7 @@
             <a:fld id="{A95F74E7-4BF7-4687-8727-E26A2E617AB2}" type="datetimeFigureOut">
               <a:rPr lang="zh-TW" altLang="en-US" smtClean="0"/>
               <a:pPr/>
-              <a:t>2023/8/8</a:t>
+              <a:t>2025/4/25</a:t>
             </a:fld>
             <a:endParaRPr lang="zh-TW" altLang="en-US"/>
           </a:p>
@@ -1867,10 +1844,9 @@
           <a:lstStyle/>
           <a:p>
             <a:r>
-              <a:rPr lang="zh-TW" altLang="en-US" smtClean="0"/>
+              <a:rPr lang="zh-TW" altLang="en-US"/>
               <a:t>按一下以編輯母片標題樣式</a:t>
             </a:r>
-            <a:endParaRPr lang="zh-TW" altLang="en-US"/>
           </a:p>
         </p:txBody>
       </p:sp>
@@ -1892,7 +1868,7 @@
             <a:fld id="{A95F74E7-4BF7-4687-8727-E26A2E617AB2}" type="datetimeFigureOut">
               <a:rPr lang="zh-TW" altLang="en-US" smtClean="0"/>
               <a:pPr/>
-              <a:t>2023/8/8</a:t>
+              <a:t>2025/4/25</a:t>
             </a:fld>
             <a:endParaRPr lang="zh-TW" altLang="en-US"/>
           </a:p>
@@ -1984,7 +1960,7 @@
             <a:fld id="{A95F74E7-4BF7-4687-8727-E26A2E617AB2}" type="datetimeFigureOut">
               <a:rPr lang="zh-TW" altLang="en-US" smtClean="0"/>
               <a:pPr/>
-              <a:t>2023/8/8</a:t>
+              <a:t>2025/4/25</a:t>
             </a:fld>
             <a:endParaRPr lang="zh-TW" altLang="en-US"/>
           </a:p>
@@ -2083,10 +2059,9 @@
           </a:lstStyle>
           <a:p>
             <a:r>
-              <a:rPr lang="zh-TW" altLang="en-US" smtClean="0"/>
+              <a:rPr lang="zh-TW" altLang="en-US"/>
               <a:t>按一下以編輯母片標題樣式</a:t>
             </a:r>
-            <a:endParaRPr lang="zh-TW" altLang="en-US"/>
           </a:p>
         </p:txBody>
       </p:sp>
@@ -2140,38 +2115,37 @@
           <a:p>
             <a:pPr lvl="0"/>
             <a:r>
-              <a:rPr lang="zh-TW" altLang="en-US" smtClean="0"/>
+              <a:rPr lang="zh-TW" altLang="en-US"/>
               <a:t>按一下以編輯母片文字樣式</a:t>
             </a:r>
           </a:p>
           <a:p>
             <a:pPr lvl="1"/>
             <a:r>
-              <a:rPr lang="zh-TW" altLang="en-US" smtClean="0"/>
+              <a:rPr lang="zh-TW" altLang="en-US"/>
               <a:t>第二層</a:t>
             </a:r>
           </a:p>
           <a:p>
             <a:pPr lvl="2"/>
             <a:r>
-              <a:rPr lang="zh-TW" altLang="en-US" smtClean="0"/>
+              <a:rPr lang="zh-TW" altLang="en-US"/>
               <a:t>第三層</a:t>
             </a:r>
           </a:p>
           <a:p>
             <a:pPr lvl="3"/>
             <a:r>
-              <a:rPr lang="zh-TW" altLang="en-US" smtClean="0"/>
+              <a:rPr lang="zh-TW" altLang="en-US"/>
               <a:t>第四層</a:t>
             </a:r>
           </a:p>
           <a:p>
             <a:pPr lvl="4"/>
             <a:r>
-              <a:rPr lang="zh-TW" altLang="en-US" smtClean="0"/>
+              <a:rPr lang="zh-TW" altLang="en-US"/>
               <a:t>第五層</a:t>
             </a:r>
-            <a:endParaRPr lang="zh-TW" altLang="en-US"/>
           </a:p>
         </p:txBody>
       </p:sp>
@@ -2234,7 +2208,7 @@
           <a:p>
             <a:pPr lvl="0"/>
             <a:r>
-              <a:rPr lang="zh-TW" altLang="en-US" smtClean="0"/>
+              <a:rPr lang="zh-TW" altLang="en-US"/>
               <a:t>按一下以編輯母片文字樣式</a:t>
             </a:r>
           </a:p>
@@ -2258,7 +2232,7 @@
             <a:fld id="{A95F74E7-4BF7-4687-8727-E26A2E617AB2}" type="datetimeFigureOut">
               <a:rPr lang="zh-TW" altLang="en-US" smtClean="0"/>
               <a:pPr/>
-              <a:t>2023/8/8</a:t>
+              <a:t>2025/4/25</a:t>
             </a:fld>
             <a:endParaRPr lang="zh-TW" altLang="en-US"/>
           </a:p>
@@ -2357,10 +2331,9 @@
           </a:lstStyle>
           <a:p>
             <a:r>
-              <a:rPr lang="zh-TW" altLang="en-US" smtClean="0"/>
+              <a:rPr lang="zh-TW" altLang="en-US"/>
               <a:t>按一下以編輯母片標題樣式</a:t>
             </a:r>
-            <a:endParaRPr lang="zh-TW" altLang="en-US"/>
           </a:p>
         </p:txBody>
       </p:sp>
@@ -2422,10 +2395,9 @@
           </a:lstStyle>
           <a:p>
             <a:r>
-              <a:rPr lang="zh-TW" altLang="en-US" smtClean="0"/>
+              <a:rPr lang="zh-TW" altLang="en-US"/>
               <a:t>按一下圖示以新增圖片</a:t>
             </a:r>
-            <a:endParaRPr lang="zh-TW" altLang="en-US"/>
           </a:p>
         </p:txBody>
       </p:sp>
@@ -2488,7 +2460,7 @@
           <a:p>
             <a:pPr lvl="0"/>
             <a:r>
-              <a:rPr lang="zh-TW" altLang="en-US" smtClean="0"/>
+              <a:rPr lang="zh-TW" altLang="en-US"/>
               <a:t>按一下以編輯母片文字樣式</a:t>
             </a:r>
           </a:p>
@@ -2512,7 +2484,7 @@
             <a:fld id="{A95F74E7-4BF7-4687-8727-E26A2E617AB2}" type="datetimeFigureOut">
               <a:rPr lang="zh-TW" altLang="en-US" smtClean="0"/>
               <a:pPr/>
-              <a:t>2023/8/8</a:t>
+              <a:t>2025/4/25</a:t>
             </a:fld>
             <a:endParaRPr lang="zh-TW" altLang="en-US"/>
           </a:p>
@@ -2622,10 +2594,9 @@
           <a:lstStyle/>
           <a:p>
             <a:r>
-              <a:rPr lang="zh-TW" altLang="en-US" smtClean="0"/>
+              <a:rPr lang="zh-TW" altLang="en-US"/>
               <a:t>按一下以編輯母片標題樣式</a:t>
             </a:r>
-            <a:endParaRPr lang="zh-TW" altLang="en-US"/>
           </a:p>
         </p:txBody>
       </p:sp>
@@ -2656,38 +2627,37 @@
           <a:p>
             <a:pPr lvl="0"/>
             <a:r>
-              <a:rPr lang="zh-TW" altLang="en-US" smtClean="0"/>
+              <a:rPr lang="zh-TW" altLang="en-US"/>
               <a:t>按一下以編輯母片文字樣式</a:t>
             </a:r>
           </a:p>
           <a:p>
             <a:pPr lvl="1"/>
             <a:r>
-              <a:rPr lang="zh-TW" altLang="en-US" smtClean="0"/>
+              <a:rPr lang="zh-TW" altLang="en-US"/>
               <a:t>第二層</a:t>
             </a:r>
           </a:p>
           <a:p>
             <a:pPr lvl="2"/>
             <a:r>
-              <a:rPr lang="zh-TW" altLang="en-US" smtClean="0"/>
+              <a:rPr lang="zh-TW" altLang="en-US"/>
               <a:t>第三層</a:t>
             </a:r>
           </a:p>
           <a:p>
             <a:pPr lvl="3"/>
             <a:r>
-              <a:rPr lang="zh-TW" altLang="en-US" smtClean="0"/>
+              <a:rPr lang="zh-TW" altLang="en-US"/>
               <a:t>第四層</a:t>
             </a:r>
           </a:p>
           <a:p>
             <a:pPr lvl="4"/>
             <a:r>
-              <a:rPr lang="zh-TW" altLang="en-US" smtClean="0"/>
+              <a:rPr lang="zh-TW" altLang="en-US"/>
               <a:t>第五層</a:t>
             </a:r>
-            <a:endParaRPr lang="zh-TW" altLang="en-US"/>
           </a:p>
         </p:txBody>
       </p:sp>
@@ -2727,7 +2697,7 @@
             <a:fld id="{A95F74E7-4BF7-4687-8727-E26A2E617AB2}" type="datetimeFigureOut">
               <a:rPr lang="zh-TW" altLang="en-US" smtClean="0"/>
               <a:pPr/>
-              <a:t>2023/8/8</a:t>
+              <a:t>2025/4/25</a:t>
             </a:fld>
             <a:endParaRPr lang="zh-TW" altLang="en-US"/>
           </a:p>
@@ -3143,1150 +3113,7 @@
     </p:spTree>
     <p:extLst>
       <p:ext uri="{BB962C8B-B14F-4D97-AF65-F5344CB8AC3E}">
-        <p14:creationId xmlns:p14="http://schemas.microsoft.com/office/powerpoint/2010/main" xmlns="" val="3944239152"/>
-      </p:ext>
-    </p:extLst>
-  </p:cSld>
-  <p:clrMapOvr>
-    <a:masterClrMapping/>
-  </p:clrMapOvr>
-  <p:timing>
-    <p:tnLst>
-      <p:par>
-        <p:cTn id="1" dur="indefinite" restart="never" nodeType="tmRoot"/>
-      </p:par>
-    </p:tnLst>
-  </p:timing>
-</p:sld>
-</file>
-
-<file path=ppt/slides/slide10.xml><?xml version="1.0" encoding="utf-8"?>
-<p:sld xmlns:a="http://schemas.openxmlformats.org/drawingml/2006/main" xmlns:r="http://schemas.openxmlformats.org/officeDocument/2006/relationships" xmlns:p="http://schemas.openxmlformats.org/presentationml/2006/main">
-  <p:cSld>
-    <p:spTree>
-      <p:nvGrpSpPr>
-        <p:cNvPr id="1" name=""/>
-        <p:cNvGrpSpPr/>
-        <p:nvPr/>
-      </p:nvGrpSpPr>
-      <p:grpSpPr>
-        <a:xfrm>
-          <a:off x="0" y="0"/>
-          <a:ext cx="0" cy="0"/>
-          <a:chOff x="0" y="0"/>
-          <a:chExt cx="0" cy="0"/>
-        </a:xfrm>
-      </p:grpSpPr>
-      <p:sp>
-        <p:nvSpPr>
-          <p:cNvPr id="5" name="內容版面配置區 4"/>
-          <p:cNvSpPr>
-            <a:spLocks noGrp="1"/>
-          </p:cNvSpPr>
-          <p:nvPr>
-            <p:ph idx="1"/>
-          </p:nvPr>
-        </p:nvSpPr>
-        <p:spPr>
-          <a:xfrm>
-            <a:off x="0" y="2084851"/>
-            <a:ext cx="12192000" cy="2404863"/>
-          </a:xfrm>
-        </p:spPr>
-        <p:txBody>
-          <a:bodyPr anchor="ctr">
-            <a:normAutofit/>
-          </a:bodyPr>
-          <a:lstStyle/>
-          <a:p>
-            <a:pPr algn="ctr">
-              <a:buNone/>
-            </a:pPr>
-            <a:r>
-              <a:rPr lang="zh-TW" altLang="en-US" sz="6400" b="1" dirty="0">
-                <a:solidFill>
-                  <a:srgbClr val="660033"/>
-                </a:solidFill>
-                <a:latin typeface="微軟正黑體" pitchFamily="34" charset="-120"/>
-                <a:ea typeface="微軟正黑體" pitchFamily="34" charset="-120"/>
-              </a:rPr>
-              <a:t>哈利路亞  哈利路亞</a:t>
-            </a:r>
-            <a:endParaRPr lang="en-US" altLang="zh-TW" sz="6400" b="1" dirty="0">
-              <a:solidFill>
-                <a:srgbClr val="660033"/>
-              </a:solidFill>
-              <a:latin typeface="微軟正黑體" pitchFamily="34" charset="-120"/>
-              <a:ea typeface="微軟正黑體" pitchFamily="34" charset="-120"/>
-            </a:endParaRPr>
-          </a:p>
-          <a:p>
-            <a:pPr algn="ctr">
-              <a:buNone/>
-            </a:pPr>
-            <a:r>
-              <a:rPr lang="zh-TW" altLang="en-US" sz="6400" b="1" dirty="0">
-                <a:solidFill>
-                  <a:srgbClr val="660033"/>
-                </a:solidFill>
-                <a:latin typeface="微軟正黑體" pitchFamily="34" charset="-120"/>
-                <a:ea typeface="微軟正黑體" pitchFamily="34" charset="-120"/>
-              </a:rPr>
-              <a:t>一切祂都知道  祂都明瞭</a:t>
-            </a:r>
-            <a:endParaRPr lang="en-US" altLang="zh-TW" sz="6400" b="1" dirty="0">
-              <a:solidFill>
-                <a:srgbClr val="660033"/>
-              </a:solidFill>
-              <a:latin typeface="微軟正黑體" pitchFamily="34" charset="-120"/>
-              <a:ea typeface="微軟正黑體" pitchFamily="34" charset="-120"/>
-            </a:endParaRPr>
-          </a:p>
-        </p:txBody>
-      </p:sp>
-      <p:sp>
-        <p:nvSpPr>
-          <p:cNvPr id="4" name="TextBox 3"/>
-          <p:cNvSpPr txBox="1"/>
-          <p:nvPr/>
-        </p:nvSpPr>
-        <p:spPr>
-          <a:xfrm>
-            <a:off x="0" y="5253206"/>
-            <a:ext cx="12192000" cy="707886"/>
-          </a:xfrm>
-          <a:prstGeom prst="rect">
-            <a:avLst/>
-          </a:prstGeom>
-          <a:noFill/>
-        </p:spPr>
-        <p:txBody>
-          <a:bodyPr wrap="square" rtlCol="0">
-            <a:spAutoFit/>
-          </a:bodyPr>
-          <a:lstStyle/>
-          <a:p>
-            <a:pPr algn="ctr"/>
-            <a:r>
-              <a:rPr lang="en-US" sz="4000" b="1" dirty="0">
-                <a:solidFill>
-                  <a:srgbClr val="660033"/>
-                </a:solidFill>
-                <a:latin typeface="Microsoft JhengHei" panose="020B0604030504040204" pitchFamily="34" charset="-120"/>
-                <a:ea typeface="Microsoft JhengHei" panose="020B0604030504040204" pitchFamily="34" charset="-120"/>
-              </a:rPr>
-              <a:t>( </a:t>
-            </a:r>
-            <a:r>
-              <a:rPr lang="zh-CN" altLang="en-US" sz="4000" b="1">
-                <a:solidFill>
-                  <a:srgbClr val="660033"/>
-                </a:solidFill>
-                <a:latin typeface="Microsoft JhengHei" panose="020B0604030504040204" pitchFamily="34" charset="-120"/>
-                <a:ea typeface="Microsoft JhengHei" panose="020B0604030504040204" pitchFamily="34" charset="-120"/>
-              </a:rPr>
-              <a:t>副</a:t>
-            </a:r>
-            <a:r>
-              <a:rPr lang="zh-CN" altLang="en-US" sz="4000" b="1" smtClean="0">
-                <a:solidFill>
-                  <a:srgbClr val="660033"/>
-                </a:solidFill>
-                <a:latin typeface="Microsoft JhengHei" panose="020B0604030504040204" pitchFamily="34" charset="-120"/>
-                <a:ea typeface="Microsoft JhengHei" panose="020B0604030504040204" pitchFamily="34" charset="-120"/>
-              </a:rPr>
-              <a:t>歌</a:t>
-            </a:r>
-            <a:r>
-              <a:rPr lang="en-US" sz="4000" b="1" smtClean="0">
-                <a:solidFill>
-                  <a:srgbClr val="660033"/>
-                </a:solidFill>
-                <a:latin typeface="Microsoft JhengHei" panose="020B0604030504040204" pitchFamily="34" charset="-120"/>
-                <a:ea typeface="Microsoft JhengHei" panose="020B0604030504040204" pitchFamily="34" charset="-120"/>
-              </a:rPr>
-              <a:t> </a:t>
-            </a:r>
-            <a:r>
-              <a:rPr lang="en-US" sz="4000" b="1" dirty="0" smtClean="0">
-                <a:solidFill>
-                  <a:srgbClr val="660033"/>
-                </a:solidFill>
-                <a:latin typeface="Microsoft JhengHei" panose="020B0604030504040204" pitchFamily="34" charset="-120"/>
-                <a:ea typeface="Microsoft JhengHei" panose="020B0604030504040204" pitchFamily="34" charset="-120"/>
-              </a:rPr>
-              <a:t>) </a:t>
-            </a:r>
-            <a:r>
-              <a:rPr lang="en-US" sz="4000" b="1" dirty="0" smtClean="0">
-                <a:solidFill>
-                  <a:srgbClr val="660033"/>
-                </a:solidFill>
-                <a:ea typeface="Microsoft JhengHei" panose="020B0604030504040204" pitchFamily="34" charset="-120"/>
-              </a:rPr>
-              <a:t>( </a:t>
-            </a:r>
-            <a:r>
-              <a:rPr lang="en-US" sz="4000" b="1" dirty="0">
-                <a:solidFill>
-                  <a:srgbClr val="660033"/>
-                </a:solidFill>
-                <a:ea typeface="Microsoft JhengHei" panose="020B0604030504040204" pitchFamily="34" charset="-120"/>
-              </a:rPr>
-              <a:t>x2 )</a:t>
-            </a:r>
-            <a:endParaRPr lang="vi-VN" sz="4000" b="1" dirty="0">
-              <a:solidFill>
-                <a:srgbClr val="660033"/>
-              </a:solidFill>
-              <a:ea typeface="Microsoft JhengHei" panose="020B0604030504040204" pitchFamily="34" charset="-120"/>
-            </a:endParaRPr>
-          </a:p>
-        </p:txBody>
-      </p:sp>
-    </p:spTree>
-    <p:extLst>
-      <p:ext uri="{BB962C8B-B14F-4D97-AF65-F5344CB8AC3E}">
-        <p14:creationId xmlns:p14="http://schemas.microsoft.com/office/powerpoint/2010/main" xmlns="" val="8165214"/>
-      </p:ext>
-    </p:extLst>
-  </p:cSld>
-  <p:clrMapOvr>
-    <a:masterClrMapping/>
-  </p:clrMapOvr>
-  <p:timing>
-    <p:tnLst>
-      <p:par>
-        <p:cTn id="1" dur="indefinite" restart="never" nodeType="tmRoot"/>
-      </p:par>
-    </p:tnLst>
-  </p:timing>
-</p:sld>
-</file>
-
-<file path=ppt/slides/slide11.xml><?xml version="1.0" encoding="utf-8"?>
-<p:sld xmlns:a="http://schemas.openxmlformats.org/drawingml/2006/main" xmlns:r="http://schemas.openxmlformats.org/officeDocument/2006/relationships" xmlns:p="http://schemas.openxmlformats.org/presentationml/2006/main">
-  <p:cSld>
-    <p:spTree>
-      <p:nvGrpSpPr>
-        <p:cNvPr id="1" name=""/>
-        <p:cNvGrpSpPr/>
-        <p:nvPr/>
-      </p:nvGrpSpPr>
-      <p:grpSpPr>
-        <a:xfrm>
-          <a:off x="0" y="0"/>
-          <a:ext cx="0" cy="0"/>
-          <a:chOff x="0" y="0"/>
-          <a:chExt cx="0" cy="0"/>
-        </a:xfrm>
-      </p:grpSpPr>
-      <p:sp>
-        <p:nvSpPr>
-          <p:cNvPr id="5" name="內容版面配置區 4"/>
-          <p:cNvSpPr>
-            <a:spLocks noGrp="1"/>
-          </p:cNvSpPr>
-          <p:nvPr>
-            <p:ph idx="1"/>
-          </p:nvPr>
-        </p:nvSpPr>
-        <p:spPr>
-          <a:xfrm>
-            <a:off x="0" y="2084851"/>
-            <a:ext cx="12192000" cy="2404863"/>
-          </a:xfrm>
-        </p:spPr>
-        <p:txBody>
-          <a:bodyPr anchor="ctr">
-            <a:normAutofit/>
-          </a:bodyPr>
-          <a:lstStyle/>
-          <a:p>
-            <a:pPr algn="ctr">
-              <a:buNone/>
-            </a:pPr>
-            <a:r>
-              <a:rPr lang="zh-TW" altLang="en-US" sz="6400" b="1" dirty="0">
-                <a:solidFill>
-                  <a:srgbClr val="660033"/>
-                </a:solidFill>
-                <a:latin typeface="微軟正黑體" pitchFamily="34" charset="-120"/>
-                <a:ea typeface="微軟正黑體" pitchFamily="34" charset="-120"/>
-              </a:rPr>
-              <a:t>我要頌揚  頌揚那顯公義的主</a:t>
-            </a:r>
-            <a:endParaRPr lang="en-US" altLang="zh-TW" sz="6400" b="1" dirty="0">
-              <a:solidFill>
-                <a:srgbClr val="660033"/>
-              </a:solidFill>
-              <a:latin typeface="微軟正黑體" pitchFamily="34" charset="-120"/>
-              <a:ea typeface="微軟正黑體" pitchFamily="34" charset="-120"/>
-            </a:endParaRPr>
-          </a:p>
-          <a:p>
-            <a:pPr algn="ctr">
-              <a:buNone/>
-            </a:pPr>
-            <a:r>
-              <a:rPr lang="zh-TW" altLang="en-US" sz="6400" b="1" dirty="0">
-                <a:solidFill>
-                  <a:srgbClr val="660033"/>
-                </a:solidFill>
-                <a:latin typeface="微軟正黑體" pitchFamily="34" charset="-120"/>
-                <a:ea typeface="微軟正黑體" pitchFamily="34" charset="-120"/>
-              </a:rPr>
-              <a:t>祂的國度是權柄榮耀</a:t>
-            </a:r>
-            <a:endParaRPr lang="en-US" altLang="zh-TW" sz="6400" b="1" dirty="0">
-              <a:solidFill>
-                <a:srgbClr val="660033"/>
-              </a:solidFill>
-              <a:latin typeface="微軟正黑體" pitchFamily="34" charset="-120"/>
-              <a:ea typeface="微軟正黑體" pitchFamily="34" charset="-120"/>
-            </a:endParaRPr>
-          </a:p>
-        </p:txBody>
-      </p:sp>
-      <p:sp>
-        <p:nvSpPr>
-          <p:cNvPr id="3" name="TextBox 2"/>
-          <p:cNvSpPr txBox="1"/>
-          <p:nvPr/>
-        </p:nvSpPr>
-        <p:spPr>
-          <a:xfrm>
-            <a:off x="0" y="5253206"/>
-            <a:ext cx="12192000" cy="707886"/>
-          </a:xfrm>
-          <a:prstGeom prst="rect">
-            <a:avLst/>
-          </a:prstGeom>
-          <a:noFill/>
-        </p:spPr>
-        <p:txBody>
-          <a:bodyPr wrap="square" rtlCol="0">
-            <a:spAutoFit/>
-          </a:bodyPr>
-          <a:lstStyle/>
-          <a:p>
-            <a:pPr algn="ctr"/>
-            <a:r>
-              <a:rPr lang="en-US" sz="4000" b="1" dirty="0">
-                <a:solidFill>
-                  <a:srgbClr val="660033"/>
-                </a:solidFill>
-                <a:latin typeface="Microsoft JhengHei" panose="020B0604030504040204" pitchFamily="34" charset="-120"/>
-                <a:ea typeface="Microsoft JhengHei" panose="020B0604030504040204" pitchFamily="34" charset="-120"/>
-              </a:rPr>
-              <a:t>( </a:t>
-            </a:r>
-            <a:r>
-              <a:rPr lang="zh-CN" altLang="en-US" sz="4000" b="1" dirty="0">
-                <a:solidFill>
-                  <a:srgbClr val="660033"/>
-                </a:solidFill>
-                <a:latin typeface="Microsoft JhengHei" panose="020B0604030504040204" pitchFamily="34" charset="-120"/>
-                <a:ea typeface="Microsoft JhengHei" panose="020B0604030504040204" pitchFamily="34" charset="-120"/>
-              </a:rPr>
-              <a:t>正歌 </a:t>
-            </a:r>
-            <a:r>
-              <a:rPr lang="en-US" sz="4000" b="1" dirty="0">
-                <a:solidFill>
-                  <a:srgbClr val="660033"/>
-                </a:solidFill>
-                <a:latin typeface="Microsoft JhengHei" panose="020B0604030504040204" pitchFamily="34" charset="-120"/>
-                <a:ea typeface="Microsoft JhengHei" panose="020B0604030504040204" pitchFamily="34" charset="-120"/>
-              </a:rPr>
-              <a:t>2 )</a:t>
-            </a:r>
-            <a:endParaRPr lang="vi-VN" sz="4000" b="1" dirty="0">
-              <a:solidFill>
-                <a:srgbClr val="660033"/>
-              </a:solidFill>
-              <a:latin typeface="Microsoft JhengHei" panose="020B0604030504040204" pitchFamily="34" charset="-120"/>
-              <a:ea typeface="Microsoft JhengHei" panose="020B0604030504040204" pitchFamily="34" charset="-120"/>
-            </a:endParaRPr>
-          </a:p>
-        </p:txBody>
-      </p:sp>
-    </p:spTree>
-    <p:extLst>
-      <p:ext uri="{BB962C8B-B14F-4D97-AF65-F5344CB8AC3E}">
-        <p14:creationId xmlns:p14="http://schemas.microsoft.com/office/powerpoint/2010/main" xmlns="" val="2830903362"/>
-      </p:ext>
-    </p:extLst>
-  </p:cSld>
-  <p:clrMapOvr>
-    <a:masterClrMapping/>
-  </p:clrMapOvr>
-  <p:timing>
-    <p:tnLst>
-      <p:par>
-        <p:cTn id="1" dur="indefinite" restart="never" nodeType="tmRoot"/>
-      </p:par>
-    </p:tnLst>
-  </p:timing>
-</p:sld>
-</file>
-
-<file path=ppt/slides/slide12.xml><?xml version="1.0" encoding="utf-8"?>
-<p:sld xmlns:a="http://schemas.openxmlformats.org/drawingml/2006/main" xmlns:r="http://schemas.openxmlformats.org/officeDocument/2006/relationships" xmlns:p="http://schemas.openxmlformats.org/presentationml/2006/main">
-  <p:cSld>
-    <p:spTree>
-      <p:nvGrpSpPr>
-        <p:cNvPr id="1" name=""/>
-        <p:cNvGrpSpPr/>
-        <p:nvPr/>
-      </p:nvGrpSpPr>
-      <p:grpSpPr>
-        <a:xfrm>
-          <a:off x="0" y="0"/>
-          <a:ext cx="0" cy="0"/>
-          <a:chOff x="0" y="0"/>
-          <a:chExt cx="0" cy="0"/>
-        </a:xfrm>
-      </p:grpSpPr>
-      <p:sp>
-        <p:nvSpPr>
-          <p:cNvPr id="5" name="內容版面配置區 4"/>
-          <p:cNvSpPr>
-            <a:spLocks noGrp="1"/>
-          </p:cNvSpPr>
-          <p:nvPr>
-            <p:ph idx="1"/>
-          </p:nvPr>
-        </p:nvSpPr>
-        <p:spPr>
-          <a:xfrm>
-            <a:off x="0" y="2084851"/>
-            <a:ext cx="12192000" cy="2404863"/>
-          </a:xfrm>
-        </p:spPr>
-        <p:txBody>
-          <a:bodyPr anchor="ctr">
-            <a:normAutofit/>
-          </a:bodyPr>
-          <a:lstStyle/>
-          <a:p>
-            <a:pPr algn="ctr">
-              <a:buNone/>
-            </a:pPr>
-            <a:r>
-              <a:rPr lang="zh-TW" altLang="en-US" sz="6400" b="1" dirty="0">
-                <a:solidFill>
-                  <a:srgbClr val="660033"/>
-                </a:solidFill>
-                <a:latin typeface="微軟正黑體" pitchFamily="34" charset="-120"/>
-                <a:ea typeface="微軟正黑體" pitchFamily="34" charset="-120"/>
-              </a:rPr>
-              <a:t>我要頌揚  頌揚那顯慈愛的主</a:t>
-            </a:r>
-            <a:endParaRPr lang="en-US" altLang="zh-TW" sz="6400" b="1" dirty="0">
-              <a:solidFill>
-                <a:srgbClr val="660033"/>
-              </a:solidFill>
-              <a:latin typeface="微軟正黑體" pitchFamily="34" charset="-120"/>
-              <a:ea typeface="微軟正黑體" pitchFamily="34" charset="-120"/>
-            </a:endParaRPr>
-          </a:p>
-          <a:p>
-            <a:pPr algn="ctr">
-              <a:buNone/>
-            </a:pPr>
-            <a:r>
-              <a:rPr lang="zh-TW" altLang="en-US" sz="6400" b="1" dirty="0">
-                <a:solidFill>
-                  <a:srgbClr val="660033"/>
-                </a:solidFill>
-                <a:latin typeface="微軟正黑體" pitchFamily="34" charset="-120"/>
-                <a:ea typeface="微軟正黑體" pitchFamily="34" charset="-120"/>
-              </a:rPr>
-              <a:t>祂的信實永不動搖</a:t>
-            </a:r>
-          </a:p>
-        </p:txBody>
-      </p:sp>
-      <p:sp>
-        <p:nvSpPr>
-          <p:cNvPr id="3" name="TextBox 2"/>
-          <p:cNvSpPr txBox="1"/>
-          <p:nvPr/>
-        </p:nvSpPr>
-        <p:spPr>
-          <a:xfrm>
-            <a:off x="0" y="5253206"/>
-            <a:ext cx="12192000" cy="707886"/>
-          </a:xfrm>
-          <a:prstGeom prst="rect">
-            <a:avLst/>
-          </a:prstGeom>
-          <a:noFill/>
-        </p:spPr>
-        <p:txBody>
-          <a:bodyPr wrap="square" rtlCol="0">
-            <a:spAutoFit/>
-          </a:bodyPr>
-          <a:lstStyle/>
-          <a:p>
-            <a:pPr algn="ctr"/>
-            <a:r>
-              <a:rPr lang="en-US" sz="4000" b="1" dirty="0">
-                <a:solidFill>
-                  <a:srgbClr val="660033"/>
-                </a:solidFill>
-                <a:latin typeface="Microsoft JhengHei" panose="020B0604030504040204" pitchFamily="34" charset="-120"/>
-                <a:ea typeface="Microsoft JhengHei" panose="020B0604030504040204" pitchFamily="34" charset="-120"/>
-              </a:rPr>
-              <a:t>( </a:t>
-            </a:r>
-            <a:r>
-              <a:rPr lang="zh-CN" altLang="en-US" sz="4000" b="1" dirty="0">
-                <a:solidFill>
-                  <a:srgbClr val="660033"/>
-                </a:solidFill>
-                <a:latin typeface="Microsoft JhengHei" panose="020B0604030504040204" pitchFamily="34" charset="-120"/>
-                <a:ea typeface="Microsoft JhengHei" panose="020B0604030504040204" pitchFamily="34" charset="-120"/>
-              </a:rPr>
-              <a:t>正歌 </a:t>
-            </a:r>
-            <a:r>
-              <a:rPr lang="en-US" sz="4000" b="1" dirty="0">
-                <a:solidFill>
-                  <a:srgbClr val="660033"/>
-                </a:solidFill>
-                <a:latin typeface="Microsoft JhengHei" panose="020B0604030504040204" pitchFamily="34" charset="-120"/>
-                <a:ea typeface="Microsoft JhengHei" panose="020B0604030504040204" pitchFamily="34" charset="-120"/>
-              </a:rPr>
-              <a:t>2 )</a:t>
-            </a:r>
-            <a:endParaRPr lang="vi-VN" sz="4000" b="1" dirty="0">
-              <a:solidFill>
-                <a:srgbClr val="660033"/>
-              </a:solidFill>
-              <a:latin typeface="Microsoft JhengHei" panose="020B0604030504040204" pitchFamily="34" charset="-120"/>
-              <a:ea typeface="Microsoft JhengHei" panose="020B0604030504040204" pitchFamily="34" charset="-120"/>
-            </a:endParaRPr>
-          </a:p>
-        </p:txBody>
-      </p:sp>
-    </p:spTree>
-    <p:extLst>
-      <p:ext uri="{BB962C8B-B14F-4D97-AF65-F5344CB8AC3E}">
-        <p14:creationId xmlns:p14="http://schemas.microsoft.com/office/powerpoint/2010/main" xmlns="" val="2850253081"/>
-      </p:ext>
-    </p:extLst>
-  </p:cSld>
-  <p:clrMapOvr>
-    <a:masterClrMapping/>
-  </p:clrMapOvr>
-  <p:timing>
-    <p:tnLst>
-      <p:par>
-        <p:cTn id="1" dur="indefinite" restart="never" nodeType="tmRoot"/>
-      </p:par>
-    </p:tnLst>
-  </p:timing>
-</p:sld>
-</file>
-
-<file path=ppt/slides/slide13.xml><?xml version="1.0" encoding="utf-8"?>
-<p:sld xmlns:a="http://schemas.openxmlformats.org/drawingml/2006/main" xmlns:r="http://schemas.openxmlformats.org/officeDocument/2006/relationships" xmlns:p="http://schemas.openxmlformats.org/presentationml/2006/main">
-  <p:cSld>
-    <p:spTree>
-      <p:nvGrpSpPr>
-        <p:cNvPr id="1" name=""/>
-        <p:cNvGrpSpPr/>
-        <p:nvPr/>
-      </p:nvGrpSpPr>
-      <p:grpSpPr>
-        <a:xfrm>
-          <a:off x="0" y="0"/>
-          <a:ext cx="0" cy="0"/>
-          <a:chOff x="0" y="0"/>
-          <a:chExt cx="0" cy="0"/>
-        </a:xfrm>
-      </p:grpSpPr>
-      <p:sp>
-        <p:nvSpPr>
-          <p:cNvPr id="5" name="內容版面配置區 4"/>
-          <p:cNvSpPr>
-            <a:spLocks noGrp="1"/>
-          </p:cNvSpPr>
-          <p:nvPr>
-            <p:ph idx="1"/>
-          </p:nvPr>
-        </p:nvSpPr>
-        <p:spPr>
-          <a:xfrm>
-            <a:off x="0" y="2084851"/>
-            <a:ext cx="12192000" cy="2404863"/>
-          </a:xfrm>
-        </p:spPr>
-        <p:txBody>
-          <a:bodyPr anchor="ctr">
-            <a:normAutofit/>
-          </a:bodyPr>
-          <a:lstStyle/>
-          <a:p>
-            <a:pPr algn="ctr">
-              <a:buNone/>
-            </a:pPr>
-            <a:r>
-              <a:rPr lang="zh-TW" altLang="en-US" sz="6400" b="1" dirty="0">
-                <a:solidFill>
-                  <a:srgbClr val="660033"/>
-                </a:solidFill>
-                <a:latin typeface="微軟正黑體" pitchFamily="34" charset="-120"/>
-                <a:ea typeface="微軟正黑體" pitchFamily="34" charset="-120"/>
-              </a:rPr>
-              <a:t>哈利路亞  哈利路亞</a:t>
-            </a:r>
-            <a:endParaRPr lang="en-US" altLang="zh-TW" sz="6400" b="1" dirty="0">
-              <a:solidFill>
-                <a:srgbClr val="660033"/>
-              </a:solidFill>
-              <a:latin typeface="微軟正黑體" pitchFamily="34" charset="-120"/>
-              <a:ea typeface="微軟正黑體" pitchFamily="34" charset="-120"/>
-            </a:endParaRPr>
-          </a:p>
-          <a:p>
-            <a:pPr algn="ctr">
-              <a:buNone/>
-            </a:pPr>
-            <a:r>
-              <a:rPr lang="zh-TW" altLang="en-US" sz="6400" b="1" dirty="0">
-                <a:solidFill>
-                  <a:srgbClr val="660033"/>
-                </a:solidFill>
-                <a:latin typeface="微軟正黑體" pitchFamily="34" charset="-120"/>
-                <a:ea typeface="微軟正黑體" pitchFamily="34" charset="-120"/>
-              </a:rPr>
-              <a:t>一切祂都知道  祂都明瞭</a:t>
-            </a:r>
-            <a:endParaRPr lang="en-US" altLang="zh-TW" sz="6400" b="1" dirty="0">
-              <a:solidFill>
-                <a:srgbClr val="660033"/>
-              </a:solidFill>
-              <a:latin typeface="微軟正黑體" pitchFamily="34" charset="-120"/>
-              <a:ea typeface="微軟正黑體" pitchFamily="34" charset="-120"/>
-            </a:endParaRPr>
-          </a:p>
-        </p:txBody>
-      </p:sp>
-      <p:sp>
-        <p:nvSpPr>
-          <p:cNvPr id="4" name="TextBox 3"/>
-          <p:cNvSpPr txBox="1"/>
-          <p:nvPr/>
-        </p:nvSpPr>
-        <p:spPr>
-          <a:xfrm>
-            <a:off x="0" y="5253206"/>
-            <a:ext cx="12192000" cy="707886"/>
-          </a:xfrm>
-          <a:prstGeom prst="rect">
-            <a:avLst/>
-          </a:prstGeom>
-          <a:noFill/>
-        </p:spPr>
-        <p:txBody>
-          <a:bodyPr wrap="square" rtlCol="0">
-            <a:spAutoFit/>
-          </a:bodyPr>
-          <a:lstStyle/>
-          <a:p>
-            <a:pPr algn="ctr"/>
-            <a:r>
-              <a:rPr lang="en-US" sz="4000" b="1" dirty="0">
-                <a:solidFill>
-                  <a:srgbClr val="660033"/>
-                </a:solidFill>
-                <a:latin typeface="Microsoft JhengHei" panose="020B0604030504040204" pitchFamily="34" charset="-120"/>
-                <a:ea typeface="Microsoft JhengHei" panose="020B0604030504040204" pitchFamily="34" charset="-120"/>
-              </a:rPr>
-              <a:t>( </a:t>
-            </a:r>
-            <a:r>
-              <a:rPr lang="zh-CN" altLang="en-US" sz="4000" b="1">
-                <a:solidFill>
-                  <a:srgbClr val="660033"/>
-                </a:solidFill>
-                <a:latin typeface="Microsoft JhengHei" panose="020B0604030504040204" pitchFamily="34" charset="-120"/>
-                <a:ea typeface="Microsoft JhengHei" panose="020B0604030504040204" pitchFamily="34" charset="-120"/>
-              </a:rPr>
-              <a:t>副</a:t>
-            </a:r>
-            <a:r>
-              <a:rPr lang="zh-CN" altLang="en-US" sz="4000" b="1" smtClean="0">
-                <a:solidFill>
-                  <a:srgbClr val="660033"/>
-                </a:solidFill>
-                <a:latin typeface="Microsoft JhengHei" panose="020B0604030504040204" pitchFamily="34" charset="-120"/>
-                <a:ea typeface="Microsoft JhengHei" panose="020B0604030504040204" pitchFamily="34" charset="-120"/>
-              </a:rPr>
-              <a:t>歌</a:t>
-            </a:r>
-            <a:r>
-              <a:rPr lang="en-US" sz="4000" b="1" smtClean="0">
-                <a:solidFill>
-                  <a:srgbClr val="660033"/>
-                </a:solidFill>
-                <a:latin typeface="Microsoft JhengHei" panose="020B0604030504040204" pitchFamily="34" charset="-120"/>
-                <a:ea typeface="Microsoft JhengHei" panose="020B0604030504040204" pitchFamily="34" charset="-120"/>
-              </a:rPr>
-              <a:t> </a:t>
-            </a:r>
-            <a:r>
-              <a:rPr lang="en-US" sz="4000" b="1" dirty="0" smtClean="0">
-                <a:solidFill>
-                  <a:srgbClr val="660033"/>
-                </a:solidFill>
-                <a:latin typeface="Microsoft JhengHei" panose="020B0604030504040204" pitchFamily="34" charset="-120"/>
-                <a:ea typeface="Microsoft JhengHei" panose="020B0604030504040204" pitchFamily="34" charset="-120"/>
-              </a:rPr>
-              <a:t>) </a:t>
-            </a:r>
-            <a:r>
-              <a:rPr lang="en-US" sz="4000" b="1" dirty="0" smtClean="0">
-                <a:solidFill>
-                  <a:srgbClr val="660033"/>
-                </a:solidFill>
-                <a:ea typeface="Microsoft JhengHei" panose="020B0604030504040204" pitchFamily="34" charset="-120"/>
-              </a:rPr>
-              <a:t>( </a:t>
-            </a:r>
-            <a:r>
-              <a:rPr lang="en-US" sz="4000" b="1" dirty="0">
-                <a:solidFill>
-                  <a:srgbClr val="660033"/>
-                </a:solidFill>
-                <a:ea typeface="Microsoft JhengHei" panose="020B0604030504040204" pitchFamily="34" charset="-120"/>
-              </a:rPr>
-              <a:t>x2 )</a:t>
-            </a:r>
-            <a:endParaRPr lang="vi-VN" sz="4000" b="1" dirty="0">
-              <a:solidFill>
-                <a:srgbClr val="660033"/>
-              </a:solidFill>
-              <a:ea typeface="Microsoft JhengHei" panose="020B0604030504040204" pitchFamily="34" charset="-120"/>
-            </a:endParaRPr>
-          </a:p>
-        </p:txBody>
-      </p:sp>
-    </p:spTree>
-    <p:extLst>
-      <p:ext uri="{BB962C8B-B14F-4D97-AF65-F5344CB8AC3E}">
-        <p14:creationId xmlns:p14="http://schemas.microsoft.com/office/powerpoint/2010/main" xmlns="" val="8165214"/>
-      </p:ext>
-    </p:extLst>
-  </p:cSld>
-  <p:clrMapOvr>
-    <a:masterClrMapping/>
-  </p:clrMapOvr>
-  <p:timing>
-    <p:tnLst>
-      <p:par>
-        <p:cTn id="1" dur="indefinite" restart="never" nodeType="tmRoot"/>
-      </p:par>
-    </p:tnLst>
-  </p:timing>
-</p:sld>
-</file>
-
-<file path=ppt/slides/slide14.xml><?xml version="1.0" encoding="utf-8"?>
-<p:sld xmlns:a="http://schemas.openxmlformats.org/drawingml/2006/main" xmlns:r="http://schemas.openxmlformats.org/officeDocument/2006/relationships" xmlns:p="http://schemas.openxmlformats.org/presentationml/2006/main">
-  <p:cSld>
-    <p:spTree>
-      <p:nvGrpSpPr>
-        <p:cNvPr id="1" name=""/>
-        <p:cNvGrpSpPr/>
-        <p:nvPr/>
-      </p:nvGrpSpPr>
-      <p:grpSpPr>
-        <a:xfrm>
-          <a:off x="0" y="0"/>
-          <a:ext cx="0" cy="0"/>
-          <a:chOff x="0" y="0"/>
-          <a:chExt cx="0" cy="0"/>
-        </a:xfrm>
-      </p:grpSpPr>
-      <p:sp>
-        <p:nvSpPr>
-          <p:cNvPr id="5" name="內容版面配置區 4"/>
-          <p:cNvSpPr>
-            <a:spLocks noGrp="1"/>
-          </p:cNvSpPr>
-          <p:nvPr>
-            <p:ph idx="1"/>
-          </p:nvPr>
-        </p:nvSpPr>
-        <p:spPr>
-          <a:xfrm>
-            <a:off x="0" y="2084851"/>
-            <a:ext cx="12192000" cy="2404863"/>
-          </a:xfrm>
-        </p:spPr>
-        <p:txBody>
-          <a:bodyPr anchor="ctr">
-            <a:normAutofit/>
-          </a:bodyPr>
-          <a:lstStyle/>
-          <a:p>
-            <a:pPr algn="ctr">
-              <a:buNone/>
-            </a:pPr>
-            <a:r>
-              <a:rPr lang="zh-TW" altLang="en-US" sz="6400" b="1" dirty="0">
-                <a:solidFill>
-                  <a:srgbClr val="660033"/>
-                </a:solidFill>
-                <a:latin typeface="微軟正黑體" pitchFamily="34" charset="-120"/>
-                <a:ea typeface="微軟正黑體" pitchFamily="34" charset="-120"/>
-              </a:rPr>
-              <a:t>哈利路亞  哈利路亞</a:t>
-            </a:r>
-            <a:endParaRPr lang="en-US" altLang="zh-TW" sz="6400" b="1" dirty="0">
-              <a:solidFill>
-                <a:srgbClr val="660033"/>
-              </a:solidFill>
-              <a:latin typeface="微軟正黑體" pitchFamily="34" charset="-120"/>
-              <a:ea typeface="微軟正黑體" pitchFamily="34" charset="-120"/>
-            </a:endParaRPr>
-          </a:p>
-          <a:p>
-            <a:pPr algn="ctr">
-              <a:buNone/>
-            </a:pPr>
-            <a:r>
-              <a:rPr lang="zh-TW" altLang="en-US" sz="6400" b="1" dirty="0">
-                <a:solidFill>
-                  <a:srgbClr val="660033"/>
-                </a:solidFill>
-                <a:latin typeface="微軟正黑體" pitchFamily="34" charset="-120"/>
-                <a:ea typeface="微軟正黑體" pitchFamily="34" charset="-120"/>
-              </a:rPr>
-              <a:t>一切祂都知道  祂都明瞭</a:t>
-            </a:r>
-            <a:endParaRPr lang="en-US" altLang="zh-TW" sz="6400" b="1" dirty="0">
-              <a:solidFill>
-                <a:srgbClr val="660033"/>
-              </a:solidFill>
-              <a:latin typeface="微軟正黑體" pitchFamily="34" charset="-120"/>
-              <a:ea typeface="微軟正黑體" pitchFamily="34" charset="-120"/>
-            </a:endParaRPr>
-          </a:p>
-        </p:txBody>
-      </p:sp>
-      <p:sp>
-        <p:nvSpPr>
-          <p:cNvPr id="4" name="TextBox 3"/>
-          <p:cNvSpPr txBox="1"/>
-          <p:nvPr/>
-        </p:nvSpPr>
-        <p:spPr>
-          <a:xfrm>
-            <a:off x="0" y="5253206"/>
-            <a:ext cx="12192000" cy="707886"/>
-          </a:xfrm>
-          <a:prstGeom prst="rect">
-            <a:avLst/>
-          </a:prstGeom>
-          <a:noFill/>
-        </p:spPr>
-        <p:txBody>
-          <a:bodyPr wrap="square" rtlCol="0">
-            <a:spAutoFit/>
-          </a:bodyPr>
-          <a:lstStyle/>
-          <a:p>
-            <a:pPr algn="ctr"/>
-            <a:r>
-              <a:rPr lang="en-US" sz="4000" b="1" dirty="0">
-                <a:solidFill>
-                  <a:srgbClr val="660033"/>
-                </a:solidFill>
-                <a:latin typeface="Microsoft JhengHei" panose="020B0604030504040204" pitchFamily="34" charset="-120"/>
-                <a:ea typeface="Microsoft JhengHei" panose="020B0604030504040204" pitchFamily="34" charset="-120"/>
-              </a:rPr>
-              <a:t>( </a:t>
-            </a:r>
-            <a:r>
-              <a:rPr lang="zh-CN" altLang="en-US" sz="4000" b="1">
-                <a:solidFill>
-                  <a:srgbClr val="660033"/>
-                </a:solidFill>
-                <a:latin typeface="Microsoft JhengHei" panose="020B0604030504040204" pitchFamily="34" charset="-120"/>
-                <a:ea typeface="Microsoft JhengHei" panose="020B0604030504040204" pitchFamily="34" charset="-120"/>
-              </a:rPr>
-              <a:t>副</a:t>
-            </a:r>
-            <a:r>
-              <a:rPr lang="zh-CN" altLang="en-US" sz="4000" b="1" smtClean="0">
-                <a:solidFill>
-                  <a:srgbClr val="660033"/>
-                </a:solidFill>
-                <a:latin typeface="Microsoft JhengHei" panose="020B0604030504040204" pitchFamily="34" charset="-120"/>
-                <a:ea typeface="Microsoft JhengHei" panose="020B0604030504040204" pitchFamily="34" charset="-120"/>
-              </a:rPr>
-              <a:t>歌</a:t>
-            </a:r>
-            <a:r>
-              <a:rPr lang="en-US" sz="4000" b="1" smtClean="0">
-                <a:solidFill>
-                  <a:srgbClr val="660033"/>
-                </a:solidFill>
-                <a:latin typeface="Microsoft JhengHei" panose="020B0604030504040204" pitchFamily="34" charset="-120"/>
-                <a:ea typeface="Microsoft JhengHei" panose="020B0604030504040204" pitchFamily="34" charset="-120"/>
-              </a:rPr>
-              <a:t> </a:t>
-            </a:r>
-            <a:r>
-              <a:rPr lang="en-US" sz="4000" b="1" dirty="0" smtClean="0">
-                <a:solidFill>
-                  <a:srgbClr val="660033"/>
-                </a:solidFill>
-                <a:latin typeface="Microsoft JhengHei" panose="020B0604030504040204" pitchFamily="34" charset="-120"/>
-                <a:ea typeface="Microsoft JhengHei" panose="020B0604030504040204" pitchFamily="34" charset="-120"/>
-              </a:rPr>
-              <a:t>) </a:t>
-            </a:r>
-            <a:r>
-              <a:rPr lang="en-US" sz="4000" b="1" dirty="0" smtClean="0">
-                <a:solidFill>
-                  <a:srgbClr val="660033"/>
-                </a:solidFill>
-                <a:ea typeface="Microsoft JhengHei" panose="020B0604030504040204" pitchFamily="34" charset="-120"/>
-              </a:rPr>
-              <a:t>( </a:t>
-            </a:r>
-            <a:r>
-              <a:rPr lang="en-US" sz="4000" b="1" dirty="0">
-                <a:solidFill>
-                  <a:srgbClr val="660033"/>
-                </a:solidFill>
-                <a:ea typeface="Microsoft JhengHei" panose="020B0604030504040204" pitchFamily="34" charset="-120"/>
-              </a:rPr>
-              <a:t>x2 )</a:t>
-            </a:r>
-            <a:endParaRPr lang="vi-VN" sz="4000" b="1" dirty="0">
-              <a:solidFill>
-                <a:srgbClr val="660033"/>
-              </a:solidFill>
-              <a:ea typeface="Microsoft JhengHei" panose="020B0604030504040204" pitchFamily="34" charset="-120"/>
-            </a:endParaRPr>
-          </a:p>
-        </p:txBody>
-      </p:sp>
-    </p:spTree>
-    <p:extLst>
-      <p:ext uri="{BB962C8B-B14F-4D97-AF65-F5344CB8AC3E}">
-        <p14:creationId xmlns:p14="http://schemas.microsoft.com/office/powerpoint/2010/main" xmlns="" val="8165214"/>
-      </p:ext>
-    </p:extLst>
-  </p:cSld>
-  <p:clrMapOvr>
-    <a:masterClrMapping/>
-  </p:clrMapOvr>
-  <p:timing>
-    <p:tnLst>
-      <p:par>
-        <p:cTn id="1" dur="indefinite" restart="never" nodeType="tmRoot"/>
-      </p:par>
-    </p:tnLst>
-  </p:timing>
-</p:sld>
-</file>
-
-<file path=ppt/slides/slide15.xml><?xml version="1.0" encoding="utf-8"?>
-<p:sld xmlns:a="http://schemas.openxmlformats.org/drawingml/2006/main" xmlns:r="http://schemas.openxmlformats.org/officeDocument/2006/relationships" xmlns:p="http://schemas.openxmlformats.org/presentationml/2006/main">
-  <p:cSld>
-    <p:spTree>
-      <p:nvGrpSpPr>
-        <p:cNvPr id="1" name=""/>
-        <p:cNvGrpSpPr/>
-        <p:nvPr/>
-      </p:nvGrpSpPr>
-      <p:grpSpPr>
-        <a:xfrm>
-          <a:off x="0" y="0"/>
-          <a:ext cx="0" cy="0"/>
-          <a:chOff x="0" y="0"/>
-          <a:chExt cx="0" cy="0"/>
-        </a:xfrm>
-      </p:grpSpPr>
-      <p:sp>
-        <p:nvSpPr>
-          <p:cNvPr id="5" name="內容版面配置區 4"/>
-          <p:cNvSpPr>
-            <a:spLocks noGrp="1"/>
-          </p:cNvSpPr>
-          <p:nvPr>
-            <p:ph idx="1"/>
-          </p:nvPr>
-        </p:nvSpPr>
-        <p:spPr>
-          <a:xfrm>
-            <a:off x="0" y="2084851"/>
-            <a:ext cx="12192000" cy="2404863"/>
-          </a:xfrm>
-        </p:spPr>
-        <p:txBody>
-          <a:bodyPr anchor="ctr">
-            <a:normAutofit/>
-          </a:bodyPr>
-          <a:lstStyle/>
-          <a:p>
-            <a:pPr algn="ctr">
-              <a:buNone/>
-            </a:pPr>
-            <a:r>
-              <a:rPr lang="zh-TW" altLang="en-US" sz="6400" b="1" dirty="0">
-                <a:solidFill>
-                  <a:srgbClr val="660033"/>
-                </a:solidFill>
-                <a:latin typeface="微軟正黑體" pitchFamily="34" charset="-120"/>
-                <a:ea typeface="微軟正黑體" pitchFamily="34" charset="-120"/>
-              </a:rPr>
-              <a:t>哈利路亞  哈利路亞</a:t>
-            </a:r>
-            <a:endParaRPr lang="en-US" altLang="zh-TW" sz="6400" b="1" dirty="0">
-              <a:solidFill>
-                <a:srgbClr val="660033"/>
-              </a:solidFill>
-              <a:latin typeface="微軟正黑體" pitchFamily="34" charset="-120"/>
-              <a:ea typeface="微軟正黑體" pitchFamily="34" charset="-120"/>
-            </a:endParaRPr>
-          </a:p>
-          <a:p>
-            <a:pPr algn="ctr">
-              <a:buNone/>
-            </a:pPr>
-            <a:r>
-              <a:rPr lang="zh-TW" altLang="en-US" sz="6400" b="1" dirty="0">
-                <a:solidFill>
-                  <a:srgbClr val="660033"/>
-                </a:solidFill>
-                <a:latin typeface="微軟正黑體" pitchFamily="34" charset="-120"/>
-                <a:ea typeface="微軟正黑體" pitchFamily="34" charset="-120"/>
-              </a:rPr>
-              <a:t>一切祂都知道  祂都明瞭</a:t>
-            </a:r>
-            <a:endParaRPr lang="en-US" altLang="zh-TW" sz="6400" b="1" dirty="0">
-              <a:solidFill>
-                <a:srgbClr val="660033"/>
-              </a:solidFill>
-              <a:latin typeface="微軟正黑體" pitchFamily="34" charset="-120"/>
-              <a:ea typeface="微軟正黑體" pitchFamily="34" charset="-120"/>
-            </a:endParaRPr>
-          </a:p>
-        </p:txBody>
-      </p:sp>
-      <p:sp>
-        <p:nvSpPr>
-          <p:cNvPr id="4" name="TextBox 3"/>
-          <p:cNvSpPr txBox="1"/>
-          <p:nvPr/>
-        </p:nvSpPr>
-        <p:spPr>
-          <a:xfrm>
-            <a:off x="0" y="5253206"/>
-            <a:ext cx="12192000" cy="707886"/>
-          </a:xfrm>
-          <a:prstGeom prst="rect">
-            <a:avLst/>
-          </a:prstGeom>
-          <a:noFill/>
-        </p:spPr>
-        <p:txBody>
-          <a:bodyPr wrap="square" rtlCol="0">
-            <a:spAutoFit/>
-          </a:bodyPr>
-          <a:lstStyle/>
-          <a:p>
-            <a:pPr algn="ctr"/>
-            <a:r>
-              <a:rPr lang="en-US" sz="4000" b="1" dirty="0">
-                <a:solidFill>
-                  <a:srgbClr val="660033"/>
-                </a:solidFill>
-                <a:latin typeface="Microsoft JhengHei" panose="020B0604030504040204" pitchFamily="34" charset="-120"/>
-                <a:ea typeface="Microsoft JhengHei" panose="020B0604030504040204" pitchFamily="34" charset="-120"/>
-              </a:rPr>
-              <a:t>( </a:t>
-            </a:r>
-            <a:r>
-              <a:rPr lang="zh-CN" altLang="en-US" sz="4000" b="1">
-                <a:solidFill>
-                  <a:srgbClr val="660033"/>
-                </a:solidFill>
-                <a:latin typeface="Microsoft JhengHei" panose="020B0604030504040204" pitchFamily="34" charset="-120"/>
-                <a:ea typeface="Microsoft JhengHei" panose="020B0604030504040204" pitchFamily="34" charset="-120"/>
-              </a:rPr>
-              <a:t>副</a:t>
-            </a:r>
-            <a:r>
-              <a:rPr lang="zh-CN" altLang="en-US" sz="4000" b="1" smtClean="0">
-                <a:solidFill>
-                  <a:srgbClr val="660033"/>
-                </a:solidFill>
-                <a:latin typeface="Microsoft JhengHei" panose="020B0604030504040204" pitchFamily="34" charset="-120"/>
-                <a:ea typeface="Microsoft JhengHei" panose="020B0604030504040204" pitchFamily="34" charset="-120"/>
-              </a:rPr>
-              <a:t>歌</a:t>
-            </a:r>
-            <a:r>
-              <a:rPr lang="en-US" sz="4000" b="1" smtClean="0">
-                <a:solidFill>
-                  <a:srgbClr val="660033"/>
-                </a:solidFill>
-                <a:latin typeface="Microsoft JhengHei" panose="020B0604030504040204" pitchFamily="34" charset="-120"/>
-                <a:ea typeface="Microsoft JhengHei" panose="020B0604030504040204" pitchFamily="34" charset="-120"/>
-              </a:rPr>
-              <a:t> </a:t>
-            </a:r>
-            <a:r>
-              <a:rPr lang="en-US" sz="4000" b="1" dirty="0" smtClean="0">
-                <a:solidFill>
-                  <a:srgbClr val="660033"/>
-                </a:solidFill>
-                <a:latin typeface="Microsoft JhengHei" panose="020B0604030504040204" pitchFamily="34" charset="-120"/>
-                <a:ea typeface="Microsoft JhengHei" panose="020B0604030504040204" pitchFamily="34" charset="-120"/>
-              </a:rPr>
-              <a:t>) </a:t>
-            </a:r>
-            <a:r>
-              <a:rPr lang="en-US" sz="4000" b="1" dirty="0" smtClean="0">
-                <a:solidFill>
-                  <a:srgbClr val="660033"/>
-                </a:solidFill>
-                <a:ea typeface="Microsoft JhengHei" panose="020B0604030504040204" pitchFamily="34" charset="-120"/>
-              </a:rPr>
-              <a:t>( </a:t>
-            </a:r>
-            <a:r>
-              <a:rPr lang="en-US" sz="4000" b="1" dirty="0">
-                <a:solidFill>
-                  <a:srgbClr val="660033"/>
-                </a:solidFill>
-                <a:ea typeface="Microsoft JhengHei" panose="020B0604030504040204" pitchFamily="34" charset="-120"/>
-              </a:rPr>
-              <a:t>x2 )</a:t>
-            </a:r>
-            <a:endParaRPr lang="vi-VN" sz="4000" b="1" dirty="0">
-              <a:solidFill>
-                <a:srgbClr val="660033"/>
-              </a:solidFill>
-              <a:ea typeface="Microsoft JhengHei" panose="020B0604030504040204" pitchFamily="34" charset="-120"/>
-            </a:endParaRPr>
-          </a:p>
-        </p:txBody>
-      </p:sp>
-    </p:spTree>
-    <p:extLst>
-      <p:ext uri="{BB962C8B-B14F-4D97-AF65-F5344CB8AC3E}">
-        <p14:creationId xmlns:p14="http://schemas.microsoft.com/office/powerpoint/2010/main" xmlns="" val="8165214"/>
+        <p14:creationId xmlns:p14="http://schemas.microsoft.com/office/powerpoint/2010/main" val="3944239152"/>
       </p:ext>
     </p:extLst>
   </p:cSld>
@@ -4414,7 +3241,7 @@
               <a:t>( </a:t>
             </a:r>
             <a:r>
-              <a:rPr lang="zh-CN" altLang="en-US" sz="4000" b="1" dirty="0" smtClean="0">
+              <a:rPr lang="zh-CN" altLang="en-US" sz="4000" b="1" dirty="0">
                 <a:solidFill>
                   <a:srgbClr val="660033"/>
                 </a:solidFill>
@@ -4424,24 +3251,14 @@
               <a:t>正歌 </a:t>
             </a:r>
             <a:r>
-              <a:rPr lang="en-US" sz="4000" b="1" dirty="0" smtClean="0">
+              <a:rPr lang="en-US" sz="4000" b="1" dirty="0">
                 <a:solidFill>
                   <a:srgbClr val="660033"/>
                 </a:solidFill>
                 <a:latin typeface="Microsoft JhengHei" panose="020B0604030504040204" pitchFamily="34" charset="-120"/>
                 <a:ea typeface="Microsoft JhengHei" panose="020B0604030504040204" pitchFamily="34" charset="-120"/>
               </a:rPr>
-              <a:t>1 </a:t>
-            </a:r>
-            <a:r>
-              <a:rPr lang="en-US" sz="4000" b="1" dirty="0">
-                <a:solidFill>
-                  <a:srgbClr val="660033"/>
-                </a:solidFill>
-                <a:latin typeface="Microsoft JhengHei" panose="020B0604030504040204" pitchFamily="34" charset="-120"/>
-                <a:ea typeface="Microsoft JhengHei" panose="020B0604030504040204" pitchFamily="34" charset="-120"/>
-              </a:rPr>
-              <a:t>)</a:t>
+              <a:t>1 )</a:t>
             </a:r>
             <a:endParaRPr lang="vi-VN" sz="4000" b="1" dirty="0">
               <a:solidFill>
@@ -4455,20 +3272,13 @@
     </p:spTree>
     <p:extLst>
       <p:ext uri="{BB962C8B-B14F-4D97-AF65-F5344CB8AC3E}">
-        <p14:creationId xmlns:p14="http://schemas.microsoft.com/office/powerpoint/2010/main" xmlns="" val="495541262"/>
+        <p14:creationId xmlns:p14="http://schemas.microsoft.com/office/powerpoint/2010/main" val="495541262"/>
       </p:ext>
     </p:extLst>
   </p:cSld>
   <p:clrMapOvr>
     <a:masterClrMapping/>
   </p:clrMapOvr>
-  <p:timing>
-    <p:tnLst>
-      <p:par>
-        <p:cTn id="1" dur="indefinite" restart="never" nodeType="tmRoot"/>
-      </p:par>
-    </p:tnLst>
-  </p:timing>
 </p:sld>
 </file>
 
@@ -4635,20 +3445,13 @@
     </p:spTree>
     <p:extLst>
       <p:ext uri="{BB962C8B-B14F-4D97-AF65-F5344CB8AC3E}">
-        <p14:creationId xmlns:p14="http://schemas.microsoft.com/office/powerpoint/2010/main" xmlns="" val="3348989334"/>
+        <p14:creationId xmlns:p14="http://schemas.microsoft.com/office/powerpoint/2010/main" val="3348989334"/>
       </p:ext>
     </p:extLst>
   </p:cSld>
   <p:clrMapOvr>
     <a:masterClrMapping/>
   </p:clrMapOvr>
-  <p:timing>
-    <p:tnLst>
-      <p:par>
-        <p:cTn id="1" dur="indefinite" restart="never" nodeType="tmRoot"/>
-      </p:par>
-    </p:tnLst>
-  </p:timing>
 </p:sld>
 </file>
 
@@ -4770,62 +3573,51 @@
               <a:t>( </a:t>
             </a:r>
             <a:r>
-              <a:rPr lang="zh-CN" altLang="en-US" sz="4000" b="1">
+              <a:rPr lang="zh-CN" altLang="en-US" sz="4000" b="1" dirty="0">
                 <a:solidFill>
                   <a:srgbClr val="660033"/>
                 </a:solidFill>
                 <a:latin typeface="Microsoft JhengHei" panose="020B0604030504040204" pitchFamily="34" charset="-120"/>
                 <a:ea typeface="Microsoft JhengHei" panose="020B0604030504040204" pitchFamily="34" charset="-120"/>
               </a:rPr>
-              <a:t>副</a:t>
-            </a:r>
-            <a:r>
-              <a:rPr lang="zh-CN" altLang="en-US" sz="4000" b="1" smtClean="0">
+              <a:t>副歌</a:t>
+            </a:r>
+            <a:r>
+              <a:rPr lang="en-US" sz="4000" b="1" dirty="0">
                 <a:solidFill>
                   <a:srgbClr val="660033"/>
                 </a:solidFill>
                 <a:latin typeface="Microsoft JhengHei" panose="020B0604030504040204" pitchFamily="34" charset="-120"/>
                 <a:ea typeface="Microsoft JhengHei" panose="020B0604030504040204" pitchFamily="34" charset="-120"/>
               </a:rPr>
-              <a:t>歌</a:t>
-            </a:r>
-            <a:r>
-              <a:rPr lang="en-US" sz="4000" b="1" smtClean="0">
+              <a:t> ) </a:t>
+            </a:r>
+            <a:r>
+              <a:rPr lang="en-US" sz="4000" b="1" dirty="0">
                 <a:solidFill>
                   <a:srgbClr val="660033"/>
                 </a:solidFill>
-                <a:latin typeface="Microsoft JhengHei" panose="020B0604030504040204" pitchFamily="34" charset="-120"/>
                 <a:ea typeface="Microsoft JhengHei" panose="020B0604030504040204" pitchFamily="34" charset="-120"/>
               </a:rPr>
-              <a:t> </a:t>
-            </a:r>
-            <a:r>
-              <a:rPr lang="en-US" sz="4000" b="1" dirty="0" smtClean="0">
+              <a:t>( 2</a:t>
+            </a:r>
+            <a:r>
+              <a:rPr lang="zh-CN" altLang="en-US" sz="4000" b="1" dirty="0">
                 <a:solidFill>
                   <a:srgbClr val="660033"/>
                 </a:solidFill>
-                <a:latin typeface="Microsoft JhengHei" panose="020B0604030504040204" pitchFamily="34" charset="-120"/>
                 <a:ea typeface="Microsoft JhengHei" panose="020B0604030504040204" pitchFamily="34" charset="-120"/>
               </a:rPr>
-              <a:t>) </a:t>
-            </a:r>
-            <a:r>
-              <a:rPr lang="en-US" sz="4000" b="1" dirty="0" smtClean="0">
+              <a:t>次</a:t>
+            </a:r>
+            <a:r>
+              <a:rPr lang="en-US" sz="4000" b="1" dirty="0">
                 <a:solidFill>
                   <a:srgbClr val="660033"/>
                 </a:solidFill>
                 <a:ea typeface="Microsoft JhengHei" panose="020B0604030504040204" pitchFamily="34" charset="-120"/>
               </a:rPr>
-              <a:t>( </a:t>
-            </a:r>
-            <a:r>
-              <a:rPr lang="en-US" sz="4000" b="1" dirty="0">
-                <a:solidFill>
-                  <a:srgbClr val="660033"/>
-                </a:solidFill>
-                <a:ea typeface="Microsoft JhengHei" panose="020B0604030504040204" pitchFamily="34" charset="-120"/>
-              </a:rPr>
-              <a:t>x2 )</a:t>
+              <a:t> )</a:t>
             </a:r>
             <a:endParaRPr lang="vi-VN" sz="4000" b="1" dirty="0">
               <a:solidFill>
@@ -4839,20 +3631,13 @@
     </p:spTree>
     <p:extLst>
       <p:ext uri="{BB962C8B-B14F-4D97-AF65-F5344CB8AC3E}">
-        <p14:creationId xmlns:p14="http://schemas.microsoft.com/office/powerpoint/2010/main" xmlns="" val="8165214"/>
+        <p14:creationId xmlns:p14="http://schemas.microsoft.com/office/powerpoint/2010/main" val="8165214"/>
       </p:ext>
     </p:extLst>
   </p:cSld>
   <p:clrMapOvr>
     <a:masterClrMapping/>
   </p:clrMapOvr>
-  <p:timing>
-    <p:tnLst>
-      <p:par>
-        <p:cTn id="1" dur="indefinite" restart="never" nodeType="tmRoot"/>
-      </p:par>
-    </p:tnLst>
-  </p:timing>
 </p:sld>
 </file>
 
@@ -5006,20 +3791,13 @@
     </p:spTree>
     <p:extLst>
       <p:ext uri="{BB962C8B-B14F-4D97-AF65-F5344CB8AC3E}">
-        <p14:creationId xmlns:p14="http://schemas.microsoft.com/office/powerpoint/2010/main" xmlns="" val="2830903362"/>
+        <p14:creationId xmlns:p14="http://schemas.microsoft.com/office/powerpoint/2010/main" val="2830903362"/>
       </p:ext>
     </p:extLst>
   </p:cSld>
   <p:clrMapOvr>
     <a:masterClrMapping/>
   </p:clrMapOvr>
-  <p:timing>
-    <p:tnLst>
-      <p:par>
-        <p:cTn id="1" dur="indefinite" restart="never" nodeType="tmRoot"/>
-      </p:par>
-    </p:tnLst>
-  </p:timing>
 </p:sld>
 </file>
 
@@ -5166,20 +3944,13 @@
     </p:spTree>
     <p:extLst>
       <p:ext uri="{BB962C8B-B14F-4D97-AF65-F5344CB8AC3E}">
-        <p14:creationId xmlns:p14="http://schemas.microsoft.com/office/powerpoint/2010/main" xmlns="" val="2850253081"/>
+        <p14:creationId xmlns:p14="http://schemas.microsoft.com/office/powerpoint/2010/main" val="2850253081"/>
       </p:ext>
     </p:extLst>
   </p:cSld>
   <p:clrMapOvr>
     <a:masterClrMapping/>
   </p:clrMapOvr>
-  <p:timing>
-    <p:tnLst>
-      <p:par>
-        <p:cTn id="1" dur="indefinite" restart="never" nodeType="tmRoot"/>
-      </p:par>
-    </p:tnLst>
-  </p:timing>
 </p:sld>
 </file>
 
@@ -5301,62 +4072,51 @@
               <a:t>( </a:t>
             </a:r>
             <a:r>
-              <a:rPr lang="zh-CN" altLang="en-US" sz="4000" b="1">
+              <a:rPr lang="zh-CN" altLang="en-US" sz="4000" b="1" dirty="0">
                 <a:solidFill>
                   <a:srgbClr val="660033"/>
                 </a:solidFill>
                 <a:latin typeface="Microsoft JhengHei" panose="020B0604030504040204" pitchFamily="34" charset="-120"/>
                 <a:ea typeface="Microsoft JhengHei" panose="020B0604030504040204" pitchFamily="34" charset="-120"/>
               </a:rPr>
-              <a:t>副</a:t>
-            </a:r>
-            <a:r>
-              <a:rPr lang="zh-CN" altLang="en-US" sz="4000" b="1" smtClean="0">
+              <a:t>副歌</a:t>
+            </a:r>
+            <a:r>
+              <a:rPr lang="en-US" sz="4000" b="1" dirty="0">
                 <a:solidFill>
                   <a:srgbClr val="660033"/>
                 </a:solidFill>
                 <a:latin typeface="Microsoft JhengHei" panose="020B0604030504040204" pitchFamily="34" charset="-120"/>
                 <a:ea typeface="Microsoft JhengHei" panose="020B0604030504040204" pitchFamily="34" charset="-120"/>
               </a:rPr>
-              <a:t>歌</a:t>
-            </a:r>
-            <a:r>
-              <a:rPr lang="en-US" sz="4000" b="1" smtClean="0">
+              <a:t> ) </a:t>
+            </a:r>
+            <a:r>
+              <a:rPr lang="en-US" sz="4000" b="1" dirty="0">
                 <a:solidFill>
                   <a:srgbClr val="660033"/>
                 </a:solidFill>
-                <a:latin typeface="Microsoft JhengHei" panose="020B0604030504040204" pitchFamily="34" charset="-120"/>
                 <a:ea typeface="Microsoft JhengHei" panose="020B0604030504040204" pitchFamily="34" charset="-120"/>
               </a:rPr>
-              <a:t> </a:t>
-            </a:r>
-            <a:r>
-              <a:rPr lang="en-US" sz="4000" b="1" dirty="0" smtClean="0">
+              <a:t>( 2</a:t>
+            </a:r>
+            <a:r>
+              <a:rPr lang="zh-CN" altLang="en-US" sz="4000" b="1" dirty="0">
                 <a:solidFill>
                   <a:srgbClr val="660033"/>
                 </a:solidFill>
-                <a:latin typeface="Microsoft JhengHei" panose="020B0604030504040204" pitchFamily="34" charset="-120"/>
                 <a:ea typeface="Microsoft JhengHei" panose="020B0604030504040204" pitchFamily="34" charset="-120"/>
               </a:rPr>
-              <a:t>) </a:t>
-            </a:r>
-            <a:r>
-              <a:rPr lang="en-US" sz="4000" b="1" dirty="0" smtClean="0">
+              <a:t>次</a:t>
+            </a:r>
+            <a:r>
+              <a:rPr lang="en-US" sz="4000" b="1">
                 <a:solidFill>
                   <a:srgbClr val="660033"/>
                 </a:solidFill>
                 <a:ea typeface="Microsoft JhengHei" panose="020B0604030504040204" pitchFamily="34" charset="-120"/>
               </a:rPr>
-              <a:t>( </a:t>
-            </a:r>
-            <a:r>
-              <a:rPr lang="en-US" sz="4000" b="1" dirty="0">
-                <a:solidFill>
-                  <a:srgbClr val="660033"/>
-                </a:solidFill>
-                <a:ea typeface="Microsoft JhengHei" panose="020B0604030504040204" pitchFamily="34" charset="-120"/>
-              </a:rPr>
-              <a:t>x2 )</a:t>
+              <a:t> )</a:t>
             </a:r>
             <a:endParaRPr lang="vi-VN" sz="4000" b="1" dirty="0">
               <a:solidFill>
@@ -5370,376 +4130,13 @@
     </p:spTree>
     <p:extLst>
       <p:ext uri="{BB962C8B-B14F-4D97-AF65-F5344CB8AC3E}">
-        <p14:creationId xmlns:p14="http://schemas.microsoft.com/office/powerpoint/2010/main" xmlns="" val="8165214"/>
+        <p14:creationId xmlns:p14="http://schemas.microsoft.com/office/powerpoint/2010/main" val="8165214"/>
       </p:ext>
     </p:extLst>
   </p:cSld>
   <p:clrMapOvr>
     <a:masterClrMapping/>
   </p:clrMapOvr>
-  <p:timing>
-    <p:tnLst>
-      <p:par>
-        <p:cTn id="1" dur="indefinite" restart="never" nodeType="tmRoot"/>
-      </p:par>
-    </p:tnLst>
-  </p:timing>
-</p:sld>
-</file>
-
-<file path=ppt/slides/slide8.xml><?xml version="1.0" encoding="utf-8"?>
-<p:sld xmlns:a="http://schemas.openxmlformats.org/drawingml/2006/main" xmlns:r="http://schemas.openxmlformats.org/officeDocument/2006/relationships" xmlns:p="http://schemas.openxmlformats.org/presentationml/2006/main">
-  <p:cSld>
-    <p:spTree>
-      <p:nvGrpSpPr>
-        <p:cNvPr id="1" name=""/>
-        <p:cNvGrpSpPr/>
-        <p:nvPr/>
-      </p:nvGrpSpPr>
-      <p:grpSpPr>
-        <a:xfrm>
-          <a:off x="0" y="0"/>
-          <a:ext cx="0" cy="0"/>
-          <a:chOff x="0" y="0"/>
-          <a:chExt cx="0" cy="0"/>
-        </a:xfrm>
-      </p:grpSpPr>
-      <p:sp>
-        <p:nvSpPr>
-          <p:cNvPr id="5" name="內容版面配置區 4"/>
-          <p:cNvSpPr>
-            <a:spLocks noGrp="1"/>
-          </p:cNvSpPr>
-          <p:nvPr>
-            <p:ph idx="1"/>
-          </p:nvPr>
-        </p:nvSpPr>
-        <p:spPr>
-          <a:xfrm>
-            <a:off x="0" y="2084851"/>
-            <a:ext cx="12192000" cy="2404863"/>
-          </a:xfrm>
-        </p:spPr>
-        <p:txBody>
-          <a:bodyPr anchor="ctr">
-            <a:normAutofit/>
-          </a:bodyPr>
-          <a:lstStyle/>
-          <a:p>
-            <a:pPr algn="ctr">
-              <a:buNone/>
-            </a:pPr>
-            <a:r>
-              <a:rPr lang="zh-TW" altLang="en-US" sz="6400" b="1" dirty="0">
-                <a:solidFill>
-                  <a:srgbClr val="660033"/>
-                </a:solidFill>
-                <a:latin typeface="微軟正黑體" pitchFamily="34" charset="-120"/>
-                <a:ea typeface="微軟正黑體" pitchFamily="34" charset="-120"/>
-              </a:rPr>
-              <a:t>我要頌揚  頌揚那造眼睛的主</a:t>
-            </a:r>
-            <a:endParaRPr lang="en-US" altLang="zh-TW" sz="6400" b="1" dirty="0">
-              <a:solidFill>
-                <a:srgbClr val="660033"/>
-              </a:solidFill>
-              <a:latin typeface="微軟正黑體" pitchFamily="34" charset="-120"/>
-              <a:ea typeface="微軟正黑體" pitchFamily="34" charset="-120"/>
-            </a:endParaRPr>
-          </a:p>
-          <a:p>
-            <a:pPr algn="ctr">
-              <a:buNone/>
-            </a:pPr>
-            <a:r>
-              <a:rPr lang="zh-TW" altLang="en-US" sz="6400" b="1" dirty="0">
-                <a:solidFill>
-                  <a:srgbClr val="660033"/>
-                </a:solidFill>
-                <a:latin typeface="微軟正黑體" pitchFamily="34" charset="-120"/>
-                <a:ea typeface="微軟正黑體" pitchFamily="34" charset="-120"/>
-              </a:rPr>
-              <a:t>因為萬事祂都看見</a:t>
-            </a:r>
-            <a:endParaRPr lang="en-US" altLang="zh-TW" sz="6400" b="1" dirty="0">
-              <a:solidFill>
-                <a:srgbClr val="660033"/>
-              </a:solidFill>
-              <a:latin typeface="微軟正黑體" pitchFamily="34" charset="-120"/>
-              <a:ea typeface="微軟正黑體" pitchFamily="34" charset="-120"/>
-            </a:endParaRPr>
-          </a:p>
-        </p:txBody>
-      </p:sp>
-      <p:sp>
-        <p:nvSpPr>
-          <p:cNvPr id="3" name="TextBox 2"/>
-          <p:cNvSpPr txBox="1"/>
-          <p:nvPr/>
-        </p:nvSpPr>
-        <p:spPr>
-          <a:xfrm>
-            <a:off x="0" y="5253206"/>
-            <a:ext cx="12192000" cy="707886"/>
-          </a:xfrm>
-          <a:prstGeom prst="rect">
-            <a:avLst/>
-          </a:prstGeom>
-          <a:noFill/>
-        </p:spPr>
-        <p:txBody>
-          <a:bodyPr wrap="square" rtlCol="0">
-            <a:spAutoFit/>
-          </a:bodyPr>
-          <a:lstStyle/>
-          <a:p>
-            <a:pPr algn="ctr"/>
-            <a:r>
-              <a:rPr lang="en-US" sz="4000" b="1" dirty="0">
-                <a:solidFill>
-                  <a:srgbClr val="660033"/>
-                </a:solidFill>
-                <a:latin typeface="Microsoft JhengHei" panose="020B0604030504040204" pitchFamily="34" charset="-120"/>
-                <a:ea typeface="Microsoft JhengHei" panose="020B0604030504040204" pitchFamily="34" charset="-120"/>
-              </a:rPr>
-              <a:t>( </a:t>
-            </a:r>
-            <a:r>
-              <a:rPr lang="zh-CN" altLang="en-US" sz="4000" b="1" dirty="0" smtClean="0">
-                <a:solidFill>
-                  <a:srgbClr val="660033"/>
-                </a:solidFill>
-                <a:latin typeface="Microsoft JhengHei" panose="020B0604030504040204" pitchFamily="34" charset="-120"/>
-                <a:ea typeface="Microsoft JhengHei" panose="020B0604030504040204" pitchFamily="34" charset="-120"/>
-              </a:rPr>
-              <a:t>正歌 </a:t>
-            </a:r>
-            <a:r>
-              <a:rPr lang="en-US" sz="4000" b="1" dirty="0" smtClean="0">
-                <a:solidFill>
-                  <a:srgbClr val="660033"/>
-                </a:solidFill>
-                <a:latin typeface="Microsoft JhengHei" panose="020B0604030504040204" pitchFamily="34" charset="-120"/>
-                <a:ea typeface="Microsoft JhengHei" panose="020B0604030504040204" pitchFamily="34" charset="-120"/>
-              </a:rPr>
-              <a:t>1 </a:t>
-            </a:r>
-            <a:r>
-              <a:rPr lang="en-US" sz="4000" b="1" dirty="0">
-                <a:solidFill>
-                  <a:srgbClr val="660033"/>
-                </a:solidFill>
-                <a:latin typeface="Microsoft JhengHei" panose="020B0604030504040204" pitchFamily="34" charset="-120"/>
-                <a:ea typeface="Microsoft JhengHei" panose="020B0604030504040204" pitchFamily="34" charset="-120"/>
-              </a:rPr>
-              <a:t>)</a:t>
-            </a:r>
-            <a:endParaRPr lang="vi-VN" sz="4000" b="1" dirty="0">
-              <a:solidFill>
-                <a:srgbClr val="660033"/>
-              </a:solidFill>
-              <a:ea typeface="Microsoft JhengHei" panose="020B0604030504040204" pitchFamily="34" charset="-120"/>
-            </a:endParaRPr>
-          </a:p>
-        </p:txBody>
-      </p:sp>
-    </p:spTree>
-    <p:extLst>
-      <p:ext uri="{BB962C8B-B14F-4D97-AF65-F5344CB8AC3E}">
-        <p14:creationId xmlns:p14="http://schemas.microsoft.com/office/powerpoint/2010/main" xmlns="" val="495541262"/>
-      </p:ext>
-    </p:extLst>
-  </p:cSld>
-  <p:clrMapOvr>
-    <a:masterClrMapping/>
-  </p:clrMapOvr>
-  <p:timing>
-    <p:tnLst>
-      <p:par>
-        <p:cTn id="1" dur="indefinite" restart="never" nodeType="tmRoot"/>
-      </p:par>
-    </p:tnLst>
-  </p:timing>
-</p:sld>
-</file>
-
-<file path=ppt/slides/slide9.xml><?xml version="1.0" encoding="utf-8"?>
-<p:sld xmlns:a="http://schemas.openxmlformats.org/drawingml/2006/main" xmlns:r="http://schemas.openxmlformats.org/officeDocument/2006/relationships" xmlns:p="http://schemas.openxmlformats.org/presentationml/2006/main">
-  <p:cSld>
-    <p:spTree>
-      <p:nvGrpSpPr>
-        <p:cNvPr id="1" name=""/>
-        <p:cNvGrpSpPr/>
-        <p:nvPr/>
-      </p:nvGrpSpPr>
-      <p:grpSpPr>
-        <a:xfrm>
-          <a:off x="0" y="0"/>
-          <a:ext cx="0" cy="0"/>
-          <a:chOff x="0" y="0"/>
-          <a:chExt cx="0" cy="0"/>
-        </a:xfrm>
-      </p:grpSpPr>
-      <p:sp>
-        <p:nvSpPr>
-          <p:cNvPr id="5" name="內容版面配置區 4"/>
-          <p:cNvSpPr>
-            <a:spLocks noGrp="1"/>
-          </p:cNvSpPr>
-          <p:nvPr>
-            <p:ph idx="1"/>
-          </p:nvPr>
-        </p:nvSpPr>
-        <p:spPr>
-          <a:xfrm>
-            <a:off x="0" y="2084851"/>
-            <a:ext cx="12192000" cy="2404863"/>
-          </a:xfrm>
-        </p:spPr>
-        <p:txBody>
-          <a:bodyPr anchor="ctr">
-            <a:normAutofit/>
-          </a:bodyPr>
-          <a:lstStyle/>
-          <a:p>
-            <a:pPr algn="ctr">
-              <a:buNone/>
-            </a:pPr>
-            <a:r>
-              <a:rPr lang="zh-TW" altLang="en-US" sz="6400" b="1" dirty="0">
-                <a:solidFill>
-                  <a:srgbClr val="660033"/>
-                </a:solidFill>
-                <a:latin typeface="微軟正黑體" pitchFamily="34" charset="-120"/>
-                <a:ea typeface="微軟正黑體" pitchFamily="34" charset="-120"/>
-              </a:rPr>
-              <a:t>我要頌揚</a:t>
-            </a:r>
-            <a:r>
-              <a:rPr lang="en-US" altLang="zh-TW" sz="6400" b="1" dirty="0">
-                <a:solidFill>
-                  <a:srgbClr val="660033"/>
-                </a:solidFill>
-                <a:latin typeface="微軟正黑體" pitchFamily="34" charset="-120"/>
-                <a:ea typeface="微軟正黑體" pitchFamily="34" charset="-120"/>
-              </a:rPr>
-              <a:t>  </a:t>
-            </a:r>
-            <a:r>
-              <a:rPr lang="zh-TW" altLang="en-US" sz="6400" b="1" dirty="0">
-                <a:solidFill>
-                  <a:srgbClr val="660033"/>
-                </a:solidFill>
-                <a:latin typeface="微軟正黑體" pitchFamily="34" charset="-120"/>
-                <a:ea typeface="微軟正黑體" pitchFamily="34" charset="-120"/>
-              </a:rPr>
-              <a:t>頌揚那造耳朵的主</a:t>
-            </a:r>
-            <a:endParaRPr lang="en-US" altLang="zh-TW" sz="6400" b="1" dirty="0">
-              <a:solidFill>
-                <a:srgbClr val="660033"/>
-              </a:solidFill>
-              <a:latin typeface="微軟正黑體" pitchFamily="34" charset="-120"/>
-              <a:ea typeface="微軟正黑體" pitchFamily="34" charset="-120"/>
-            </a:endParaRPr>
-          </a:p>
-          <a:p>
-            <a:pPr algn="ctr">
-              <a:buNone/>
-            </a:pPr>
-            <a:r>
-              <a:rPr lang="zh-TW" altLang="en-US" sz="6400" b="1" dirty="0">
-                <a:solidFill>
-                  <a:srgbClr val="660033"/>
-                </a:solidFill>
-                <a:latin typeface="微軟正黑體" pitchFamily="34" charset="-120"/>
-                <a:ea typeface="微軟正黑體" pitchFamily="34" charset="-120"/>
-              </a:rPr>
-              <a:t>因為萬事祂都聽見</a:t>
-            </a:r>
-          </a:p>
-        </p:txBody>
-      </p:sp>
-      <p:sp>
-        <p:nvSpPr>
-          <p:cNvPr id="3" name="TextBox 2"/>
-          <p:cNvSpPr txBox="1"/>
-          <p:nvPr/>
-        </p:nvSpPr>
-        <p:spPr>
-          <a:xfrm>
-            <a:off x="0" y="5253206"/>
-            <a:ext cx="12192000" cy="707886"/>
-          </a:xfrm>
-          <a:prstGeom prst="rect">
-            <a:avLst/>
-          </a:prstGeom>
-          <a:noFill/>
-        </p:spPr>
-        <p:txBody>
-          <a:bodyPr wrap="square" rtlCol="0">
-            <a:spAutoFit/>
-          </a:bodyPr>
-          <a:lstStyle/>
-          <a:p>
-            <a:pPr algn="ctr"/>
-            <a:r>
-              <a:rPr lang="en-US" sz="4000" b="1" dirty="0">
-                <a:solidFill>
-                  <a:srgbClr val="660033"/>
-                </a:solidFill>
-                <a:latin typeface="Microsoft JhengHei" panose="020B0604030504040204" pitchFamily="34" charset="-120"/>
-                <a:ea typeface="Microsoft JhengHei" panose="020B0604030504040204" pitchFamily="34" charset="-120"/>
-              </a:rPr>
-              <a:t>( </a:t>
-            </a:r>
-            <a:r>
-              <a:rPr lang="zh-CN" altLang="en-US" sz="4000" b="1" dirty="0">
-                <a:solidFill>
-                  <a:srgbClr val="660033"/>
-                </a:solidFill>
-                <a:latin typeface="Microsoft JhengHei" panose="020B0604030504040204" pitchFamily="34" charset="-120"/>
-                <a:ea typeface="Microsoft JhengHei" panose="020B0604030504040204" pitchFamily="34" charset="-120"/>
-              </a:rPr>
-              <a:t>正歌 </a:t>
-            </a:r>
-            <a:r>
-              <a:rPr lang="en-US" sz="4000" b="1" dirty="0">
-                <a:solidFill>
-                  <a:srgbClr val="660033"/>
-                </a:solidFill>
-                <a:latin typeface="Microsoft JhengHei" panose="020B0604030504040204" pitchFamily="34" charset="-120"/>
-                <a:ea typeface="Microsoft JhengHei" panose="020B0604030504040204" pitchFamily="34" charset="-120"/>
-              </a:rPr>
-              <a:t>1 )</a:t>
-            </a:r>
-            <a:endParaRPr lang="vi-VN" sz="4000" b="1" dirty="0">
-              <a:solidFill>
-                <a:srgbClr val="660033"/>
-              </a:solidFill>
-              <a:latin typeface="Microsoft JhengHei" panose="020B0604030504040204" pitchFamily="34" charset="-120"/>
-              <a:ea typeface="Microsoft JhengHei" panose="020B0604030504040204" pitchFamily="34" charset="-120"/>
-            </a:endParaRPr>
-          </a:p>
-        </p:txBody>
-      </p:sp>
-    </p:spTree>
-    <p:extLst>
-      <p:ext uri="{BB962C8B-B14F-4D97-AF65-F5344CB8AC3E}">
-        <p14:creationId xmlns:p14="http://schemas.microsoft.com/office/powerpoint/2010/main" xmlns="" val="3348989334"/>
-      </p:ext>
-    </p:extLst>
-  </p:cSld>
-  <p:clrMapOvr>
-    <a:masterClrMapping/>
-  </p:clrMapOvr>
-  <p:timing>
-    <p:tnLst>
-      <p:par>
-        <p:cTn id="1" dur="indefinite" restart="never" nodeType="tmRoot"/>
-      </p:par>
-    </p:tnLst>
-  </p:timing>
 </p:sld>
 </file>
 
